--- a/deliverables/agentpass-guard-frontier-deck.pptx
+++ b/deliverables/agentpass-guard-frontier-deck.pptx
@@ -1992,7 +1992,7 @@
                 <a:ea typeface="JetBrains Mono" pitchFamily="34" charset="-122"/>
                 <a:cs typeface="JetBrains Mono" pitchFamily="34" charset="-120"/>
               </a:rPr>
-              <a:t>github.com/currentlycodinng/agentpass-guard</a:t>
+              <a:t>currentlycodinng.github.io/agentpass-guard</a:t>
             </a:r>
             <a:endParaRPr lang="en-US" sz="1100" dirty="0"/>
           </a:p>
@@ -2006,8 +2006,8 @@
         </p:nvSpPr>
         <p:spPr>
           <a:xfrm>
-            <a:off x="640080" y="6355080"/>
-            <a:ext cx="1097280" cy="45720"/>
+            <a:off x="548640" y="6355080"/>
+            <a:ext cx="3657600" cy="54864"/>
           </a:xfrm>
           <a:prstGeom prst="rect">
             <a:avLst/>
@@ -2031,8 +2031,8 @@
         </p:nvSpPr>
         <p:spPr>
           <a:xfrm>
-            <a:off x="1737360" y="6355080"/>
-            <a:ext cx="1097280" cy="45720"/>
+            <a:off x="4206240" y="6355080"/>
+            <a:ext cx="3657600" cy="54864"/>
           </a:xfrm>
           <a:prstGeom prst="rect">
             <a:avLst/>
@@ -2056,8 +2056,8 @@
         </p:nvSpPr>
         <p:spPr>
           <a:xfrm>
-            <a:off x="2834640" y="6355080"/>
-            <a:ext cx="1097280" cy="45720"/>
+            <a:off x="7863840" y="6355080"/>
+            <a:ext cx="3657600" cy="54864"/>
           </a:xfrm>
           <a:prstGeom prst="rect">
             <a:avLst/>
@@ -2391,7 +2391,7 @@
                 <a:ea typeface="Inter" pitchFamily="34" charset="-122"/>
                 <a:cs typeface="Inter" pitchFamily="34" charset="-120"/>
               </a:rPr>
-              <a:t>AI agents are moving from chat to execution — they search, write code, call tools, and now pay for APIs. The unsolved problem is the next one.</a:t>
+              <a:t>Builders without a policy layer have two bad choices: approve every micro-payment by hand, or hand the agent unlimited credentials. Neither scales.</a:t>
             </a:r>
             <a:endParaRPr lang="en-US" sz="1600" dirty="0"/>
           </a:p>
@@ -2405,7 +2405,7 @@
         </p:nvSpPr>
         <p:spPr>
           <a:xfrm>
-            <a:off x="594360" y="3941064"/>
+            <a:off x="594360" y="4005072"/>
             <a:ext cx="128016" cy="128016"/>
           </a:xfrm>
           <a:prstGeom prst="ellipse">
@@ -2430,8 +2430,8 @@
         </p:nvSpPr>
         <p:spPr>
           <a:xfrm>
-            <a:off x="886968" y="3794760"/>
-            <a:ext cx="6473952" cy="411480"/>
+            <a:off x="886968" y="3840480"/>
+            <a:ext cx="10680192" cy="457200"/>
           </a:xfrm>
           <a:prstGeom prst="rect">
             <a:avLst/>
@@ -2447,7 +2447,7 @@
               <a:buNone/>
             </a:pPr>
             <a:r>
-              <a:rPr lang="en-US" sz="1350" dirty="0">
+              <a:rPr lang="en-US" sz="1400" dirty="0">
                 <a:solidFill>
                   <a:srgbClr val="0B1020"/>
                 </a:solidFill>
@@ -2455,9 +2455,9 @@
                 <a:ea typeface="Inter" pitchFamily="34" charset="-122"/>
                 <a:cs typeface="Inter" pitchFamily="34" charset="-120"/>
               </a:rPr>
-              <a:t>Pay.sh and x402 unlock agent-paid APIs on Solana.</a:t>
-            </a:r>
-            <a:endParaRPr lang="en-US" sz="1350" dirty="0"/>
+              <a:t>pay.sh and x402 unlock agent-paid APIs on Solana.</a:t>
+            </a:r>
+            <a:endParaRPr lang="en-US" sz="1400" dirty="0"/>
           </a:p>
         </p:txBody>
       </p:sp>
@@ -2469,7 +2469,7 @@
         </p:nvSpPr>
         <p:spPr>
           <a:xfrm>
-            <a:off x="594360" y="4352544"/>
+            <a:off x="594360" y="4462272"/>
             <a:ext cx="128016" cy="128016"/>
           </a:xfrm>
           <a:prstGeom prst="ellipse">
@@ -2494,8 +2494,8 @@
         </p:nvSpPr>
         <p:spPr>
           <a:xfrm>
-            <a:off x="886968" y="4206240"/>
-            <a:ext cx="6473952" cy="411480"/>
+            <a:off x="886968" y="4297680"/>
+            <a:ext cx="10680192" cy="457200"/>
           </a:xfrm>
           <a:prstGeom prst="rect">
             <a:avLst/>
@@ -2511,7 +2511,7 @@
               <a:buNone/>
             </a:pPr>
             <a:r>
-              <a:rPr lang="en-US" sz="1350" dirty="0">
+              <a:rPr lang="en-US" sz="1400" dirty="0">
                 <a:solidFill>
                   <a:srgbClr val="0B1020"/>
                 </a:solidFill>
@@ -2521,7 +2521,7 @@
               </a:rPr>
               <a:t>Unrestricted agent wallets are unsafe.</a:t>
             </a:r>
-            <a:endParaRPr lang="en-US" sz="1350" dirty="0"/>
+            <a:endParaRPr lang="en-US" sz="1400" dirty="0"/>
           </a:p>
         </p:txBody>
       </p:sp>
@@ -2533,7 +2533,7 @@
         </p:nvSpPr>
         <p:spPr>
           <a:xfrm>
-            <a:off x="594360" y="4764024"/>
+            <a:off x="594360" y="4919472"/>
             <a:ext cx="128016" cy="128016"/>
           </a:xfrm>
           <a:prstGeom prst="ellipse">
@@ -2558,8 +2558,8 @@
         </p:nvSpPr>
         <p:spPr>
           <a:xfrm>
-            <a:off x="886968" y="4617720"/>
-            <a:ext cx="6473952" cy="411480"/>
+            <a:off x="886968" y="4754880"/>
+            <a:ext cx="10680192" cy="457200"/>
           </a:xfrm>
           <a:prstGeom prst="rect">
             <a:avLst/>
@@ -2575,7 +2575,7 @@
               <a:buNone/>
             </a:pPr>
             <a:r>
-              <a:rPr lang="en-US" sz="1350" dirty="0">
+              <a:rPr lang="en-US" sz="1400" dirty="0">
                 <a:solidFill>
                   <a:srgbClr val="0B1020"/>
                 </a:solidFill>
@@ -2585,7 +2585,7 @@
               </a:rPr>
               <a:t>Manual approval for every micro-payment kills autonomy.</a:t>
             </a:r>
-            <a:endParaRPr lang="en-US" sz="1350" dirty="0"/>
+            <a:endParaRPr lang="en-US" sz="1400" dirty="0"/>
           </a:p>
         </p:txBody>
       </p:sp>
@@ -2597,7 +2597,7 @@
         </p:nvSpPr>
         <p:spPr>
           <a:xfrm>
-            <a:off x="594360" y="5175504"/>
+            <a:off x="594360" y="5376672"/>
             <a:ext cx="128016" cy="128016"/>
           </a:xfrm>
           <a:prstGeom prst="ellipse">
@@ -2622,8 +2622,8 @@
         </p:nvSpPr>
         <p:spPr>
           <a:xfrm>
-            <a:off x="886968" y="5029200"/>
-            <a:ext cx="6473952" cy="411480"/>
+            <a:off x="886968" y="5212080"/>
+            <a:ext cx="10680192" cy="457200"/>
           </a:xfrm>
           <a:prstGeom prst="rect">
             <a:avLst/>
@@ -2639,7 +2639,7 @@
               <a:buNone/>
             </a:pPr>
             <a:r>
-              <a:rPr lang="en-US" sz="1350" dirty="0">
+              <a:rPr lang="en-US" sz="1400" dirty="0">
                 <a:solidFill>
                   <a:srgbClr val="0B1020"/>
                 </a:solidFill>
@@ -2649,47 +2649,20 @@
               </a:rPr>
               <a:t>Builders need to test budget, allowlist, threshold, and revocation before live spend.</a:t>
             </a:r>
-            <a:endParaRPr lang="en-US" sz="1350" dirty="0"/>
-          </a:p>
-        </p:txBody>
-      </p:sp>
-      <p:sp>
-        <p:nvSpPr>
-          <p:cNvPr id="18" name="Shape 16"/>
-          <p:cNvSpPr/>
-          <p:nvPr/>
-        </p:nvSpPr>
-        <p:spPr>
-          <a:xfrm>
-            <a:off x="7726680" y="3657600"/>
-            <a:ext cx="3931920" cy="2377440"/>
-          </a:xfrm>
-          <a:prstGeom prst="roundRect">
-            <a:avLst>
-              <a:gd name="adj" fmla="val 3077"/>
-            </a:avLst>
-          </a:prstGeom>
-          <a:solidFill>
-            <a:srgbClr val="F6F7FB"/>
-          </a:solidFill>
-          <a:ln w="9525">
-            <a:solidFill>
-              <a:srgbClr val="E6E8F0"/>
-            </a:solidFill>
-            <a:prstDash val="solid"/>
-          </a:ln>
-        </p:spPr>
-      </p:sp>
-      <p:sp>
-        <p:nvSpPr>
-          <p:cNvPr id="19" name="Text 17"/>
-          <p:cNvSpPr/>
-          <p:nvPr/>
-        </p:nvSpPr>
-        <p:spPr>
-          <a:xfrm>
-            <a:off x="8019288" y="3913632"/>
-            <a:ext cx="3383280" cy="256032"/>
+            <a:endParaRPr lang="en-US" sz="1400" dirty="0"/>
+          </a:p>
+        </p:txBody>
+      </p:sp>
+      <p:sp>
+        <p:nvSpPr>
+          <p:cNvPr id="18" name="Text 16"/>
+          <p:cNvSpPr/>
+          <p:nvPr/>
+        </p:nvSpPr>
+        <p:spPr>
+          <a:xfrm>
+            <a:off x="548640" y="6446520"/>
+            <a:ext cx="7315200" cy="228600"/>
           </a:xfrm>
           <a:prstGeom prst="rect">
             <a:avLst/>
@@ -2705,137 +2678,15 @@
               <a:buNone/>
             </a:pPr>
             <a:r>
-              <a:rPr lang="en-US" sz="850" b="1" spc="200" kern="0" dirty="0">
-                <a:solidFill>
-                  <a:srgbClr val="9945FF"/>
+              <a:rPr lang="en-US" sz="800" dirty="0">
+                <a:solidFill>
+                  <a:srgbClr val="6B7393"/>
                 </a:solidFill>
                 <a:latin typeface="JetBrains Mono" pitchFamily="34" charset="0"/>
                 <a:ea typeface="JetBrains Mono" pitchFamily="34" charset="-122"/>
                 <a:cs typeface="JetBrains Mono" pitchFamily="34" charset="-120"/>
               </a:rPr>
-              <a:t>THE MISSING LAYER</a:t>
-            </a:r>
-            <a:endParaRPr lang="en-US" sz="850" dirty="0"/>
-          </a:p>
-        </p:txBody>
-      </p:sp>
-      <p:sp>
-        <p:nvSpPr>
-          <p:cNvPr id="20" name="Text 18"/>
-          <p:cNvSpPr/>
-          <p:nvPr/>
-        </p:nvSpPr>
-        <p:spPr>
-          <a:xfrm>
-            <a:off x="8019288" y="4224528"/>
-            <a:ext cx="3383280" cy="548640"/>
-          </a:xfrm>
-          <a:prstGeom prst="rect">
-            <a:avLst/>
-          </a:prstGeom>
-          <a:noFill/>
-          <a:ln/>
-        </p:spPr>
-        <p:txBody>
-          <a:bodyPr wrap="square" lIns="0" tIns="0" rIns="0" bIns="0" rtlCol="0" anchor="ctr">
-            <a:normAutofit/>
-          </a:bodyPr>
-          <a:lstStyle/>
-          <a:p>
-            <a:pPr indent="0" marL="0">
-              <a:buNone/>
-            </a:pPr>
-            <a:r>
-              <a:rPr lang="en-US" sz="1800" b="1" dirty="0">
-                <a:solidFill>
-                  <a:srgbClr val="0B1020"/>
-                </a:solidFill>
-                <a:latin typeface="Inter" pitchFamily="34" charset="0"/>
-                <a:ea typeface="Inter" pitchFamily="34" charset="-122"/>
-                <a:cs typeface="Inter" pitchFamily="34" charset="-120"/>
-              </a:rPr>
-              <a:t>Trust, before settlement.</a:t>
-            </a:r>
-            <a:endParaRPr lang="en-US" sz="1800" dirty="0"/>
-          </a:p>
-        </p:txBody>
-      </p:sp>
-      <p:sp>
-        <p:nvSpPr>
-          <p:cNvPr id="21" name="Text 19"/>
-          <p:cNvSpPr/>
-          <p:nvPr/>
-        </p:nvSpPr>
-        <p:spPr>
-          <a:xfrm>
-            <a:off x="8019288" y="4800600"/>
-            <a:ext cx="3383280" cy="1051560"/>
-          </a:xfrm>
-          <a:prstGeom prst="rect">
-            <a:avLst/>
-          </a:prstGeom>
-          <a:noFill/>
-          <a:ln/>
-        </p:spPr>
-        <p:txBody>
-          <a:bodyPr wrap="square" lIns="0" tIns="0" rIns="0" bIns="0" rtlCol="0" anchor="t"/>
-          <a:lstStyle/>
-          <a:p>
-            <a:pPr indent="0" marL="0">
-              <a:spcAft>
-                <a:spcPts val="400"/>
-              </a:spcAft>
-              <a:buNone/>
-            </a:pPr>
-            <a:r>
-              <a:rPr lang="en-US" sz="1200" dirty="0">
-                <a:solidFill>
-                  <a:srgbClr val="2B3556"/>
-                </a:solidFill>
-                <a:latin typeface="Inter" pitchFamily="34" charset="0"/>
-                <a:ea typeface="Inter" pitchFamily="34" charset="-122"/>
-                <a:cs typeface="Inter" pitchFamily="34" charset="-120"/>
-              </a:rPr>
-              <a:t>The payment rail is arriving. The control plane on top of it is still thin. AgentPass Guard is that control plane.</a:t>
-            </a:r>
-            <a:endParaRPr lang="en-US" sz="1200" dirty="0"/>
-          </a:p>
-        </p:txBody>
-      </p:sp>
-      <p:sp>
-        <p:nvSpPr>
-          <p:cNvPr id="22" name="Text 20"/>
-          <p:cNvSpPr/>
-          <p:nvPr/>
-        </p:nvSpPr>
-        <p:spPr>
-          <a:xfrm>
-            <a:off x="548640" y="6446520"/>
-            <a:ext cx="7315200" cy="228600"/>
-          </a:xfrm>
-          <a:prstGeom prst="rect">
-            <a:avLst/>
-          </a:prstGeom>
-          <a:noFill/>
-          <a:ln/>
-        </p:spPr>
-        <p:txBody>
-          <a:bodyPr wrap="square" lIns="0" tIns="0" rIns="0" bIns="0" rtlCol="0" anchor="ctr"/>
-          <a:lstStyle/>
-          <a:p>
-            <a:pPr indent="0" marL="0">
-              <a:buNone/>
-            </a:pPr>
-            <a:r>
-              <a:rPr lang="en-US" sz="800" dirty="0">
-                <a:solidFill>
-                  <a:srgbClr val="6B7393"/>
-                </a:solidFill>
-                <a:latin typeface="JetBrains Mono" pitchFamily="34" charset="0"/>
-                <a:ea typeface="JetBrains Mono" pitchFamily="34" charset="-122"/>
-                <a:cs typeface="JetBrains Mono" pitchFamily="34" charset="-120"/>
-              </a:rPr>
-              <a:t>agentpass-guard · github.com/currentlycodinng/agentpass-guard</a:t>
+              <a:t>github.com/currentlycodinng/agentpass-guard</a:t>
             </a:r>
             <a:endParaRPr lang="en-US" sz="800" dirty="0"/>
           </a:p>
@@ -2843,7 +2694,7 @@
       </p:sp>
       <p:sp>
         <p:nvSpPr>
-          <p:cNvPr id="23" name="Text 21"/>
+          <p:cNvPr id="19" name="Text 17"/>
           <p:cNvSpPr/>
           <p:nvPr/>
         </p:nvSpPr>
@@ -3077,7 +2928,7 @@
                 <a:ea typeface="JetBrains Mono" pitchFamily="34" charset="-122"/>
                 <a:cs typeface="JetBrains Mono" pitchFamily="34" charset="-120"/>
               </a:rPr>
-              <a:t>WHY NOW</a:t>
+              <a:t>THE PRODUCT</a:t>
             </a:r>
             <a:endParaRPr lang="en-US" sz="850" dirty="0"/>
           </a:p>
@@ -3130,8 +2981,47 @@
         </p:nvSpPr>
         <p:spPr>
           <a:xfrm>
-            <a:off x="548640" y="1280160"/>
-            <a:ext cx="11064240" cy="1463040"/>
+            <a:off x="548640" y="1188720"/>
+            <a:ext cx="10972800" cy="274320"/>
+          </a:xfrm>
+          <a:prstGeom prst="rect">
+            <a:avLst/>
+          </a:prstGeom>
+          <a:noFill/>
+          <a:ln/>
+        </p:spPr>
+        <p:txBody>
+          <a:bodyPr wrap="square" lIns="0" tIns="0" rIns="0" bIns="0" rtlCol="0" anchor="ctr"/>
+          <a:lstStyle/>
+          <a:p>
+            <a:pPr indent="0" marL="0">
+              <a:buNone/>
+            </a:pPr>
+            <a:r>
+              <a:rPr lang="en-US" sz="900" b="1" spc="200" kern="0" dirty="0">
+                <a:solidFill>
+                  <a:srgbClr val="6B7393"/>
+                </a:solidFill>
+                <a:latin typeface="JetBrains Mono" pitchFamily="34" charset="0"/>
+                <a:ea typeface="JetBrains Mono" pitchFamily="34" charset="-122"/>
+                <a:cs typeface="JetBrains Mono" pitchFamily="34" charset="-120"/>
+              </a:rPr>
+              <a:t>THE WEDGE</a:t>
+            </a:r>
+            <a:endParaRPr lang="en-US" sz="900" dirty="0"/>
+          </a:p>
+        </p:txBody>
+      </p:sp>
+      <p:sp>
+        <p:nvSpPr>
+          <p:cNvPr id="9" name="Text 7"/>
+          <p:cNvSpPr/>
+          <p:nvPr/>
+        </p:nvSpPr>
+        <p:spPr>
+          <a:xfrm>
+            <a:off x="548640" y="1481328"/>
+            <a:ext cx="11064240" cy="640080"/>
           </a:xfrm>
           <a:prstGeom prst="rect">
             <a:avLst/>
@@ -3149,7 +3039,7 @@
               <a:buNone/>
             </a:pPr>
             <a:r>
-              <a:rPr lang="en-US" sz="4000" b="1" dirty="0">
+              <a:rPr lang="en-US" sz="2600" b="1" dirty="0">
                 <a:solidFill>
                   <a:srgbClr val="0B1020"/>
                 </a:solidFill>
@@ -3157,48 +3047,9 @@
                 <a:ea typeface="Inter" pitchFamily="34" charset="-122"/>
                 <a:cs typeface="Inter" pitchFamily="34" charset="-120"/>
               </a:rPr>
-              <a:t>Agent-paid APIs are becoming real.</a:t>
-            </a:r>
-            <a:endParaRPr lang="en-US" sz="4000" dirty="0"/>
-          </a:p>
-        </p:txBody>
-      </p:sp>
-      <p:sp>
-        <p:nvSpPr>
-          <p:cNvPr id="9" name="Text 7"/>
-          <p:cNvSpPr/>
-          <p:nvPr/>
-        </p:nvSpPr>
-        <p:spPr>
-          <a:xfrm>
-            <a:off x="548640" y="2331720"/>
-            <a:ext cx="11064240" cy="548640"/>
-          </a:xfrm>
-          <a:prstGeom prst="rect">
-            <a:avLst/>
-          </a:prstGeom>
-          <a:noFill/>
-          <a:ln/>
-        </p:spPr>
-        <p:txBody>
-          <a:bodyPr wrap="square" lIns="0" tIns="0" rIns="0" bIns="0" rtlCol="0" anchor="ctr"/>
-          <a:lstStyle/>
-          <a:p>
-            <a:pPr indent="0" marL="0">
-              <a:buNone/>
-            </a:pPr>
-            <a:r>
-              <a:rPr lang="en-US" sz="1800" b="1" dirty="0">
-                <a:solidFill>
-                  <a:srgbClr val="2B3556"/>
-                </a:solidFill>
-                <a:latin typeface="Inter" pitchFamily="34" charset="0"/>
-                <a:ea typeface="Inter" pitchFamily="34" charset="-122"/>
-                <a:cs typeface="Inter" pitchFamily="34" charset="-120"/>
-              </a:rPr>
-              <a:t>The next layer is policy:  what is this agent allowed to buy?</a:t>
-            </a:r>
-            <a:endParaRPr lang="en-US" sz="1800" dirty="0"/>
+              <a:t>Pay.sh and x402 give agents a checkout. We give builders the brakes.</a:t>
+            </a:r>
+            <a:endParaRPr lang="en-US" sz="2600" dirty="0"/>
           </a:p>
         </p:txBody>
       </p:sp>
@@ -3210,16 +3061,72 @@
         </p:nvSpPr>
         <p:spPr>
           <a:xfrm>
-            <a:off x="548640" y="3108960"/>
-            <a:ext cx="3657600" cy="2743200"/>
+            <a:off x="594360" y="2496312"/>
+            <a:ext cx="11064240" cy="3703320"/>
           </a:xfrm>
           <a:prstGeom prst="roundRect">
             <a:avLst>
-              <a:gd name="adj" fmla="val 2667"/>
+              <a:gd name="adj" fmla="val 1975"/>
             </a:avLst>
           </a:prstGeom>
           <a:solidFill>
-            <a:srgbClr val="FFFFFF"/>
+            <a:srgbClr val="0B1020">
+              <a:alpha val="8000"/>
+            </a:srgbClr>
+          </a:solidFill>
+          <a:ln w="12700">
+            <a:solidFill>
+              <a:srgbClr val="0B1020">
+                <a:alpha val="8000"/>
+              </a:srgbClr>
+            </a:solidFill>
+            <a:prstDash val="solid"/>
+          </a:ln>
+        </p:spPr>
+      </p:sp>
+      <p:pic>
+        <p:nvPicPr>
+          <p:cNvPr id="11" name="Image 0" descr="assets/screenshots/02-how.png">    </p:cNvPr>
+          <p:cNvPicPr>
+            <a:picLocks noChangeAspect="1"/>
+          </p:cNvPicPr>
+          <p:nvPr/>
+        </p:nvPicPr>
+        <p:blipFill>
+          <a:blip r:embed="rId1"/>
+          <a:srcRect l="0" r="0" t="0" b="0"/>
+          <a:stretch/>
+        </p:blipFill>
+        <p:spPr>
+          <a:xfrm>
+            <a:off x="548640" y="2423160"/>
+            <a:ext cx="11064240" cy="3703320"/>
+          </a:xfrm>
+          <a:prstGeom prst="rect">
+            <a:avLst/>
+          </a:prstGeom>
+        </p:spPr>
+      </p:pic>
+      <p:sp>
+        <p:nvSpPr>
+          <p:cNvPr id="12" name="Shape 9"/>
+          <p:cNvSpPr/>
+          <p:nvPr/>
+        </p:nvSpPr>
+        <p:spPr>
+          <a:xfrm>
+            <a:off x="548640" y="2423160"/>
+            <a:ext cx="11064240" cy="3703320"/>
+          </a:xfrm>
+          <a:prstGeom prst="roundRect">
+            <a:avLst>
+              <a:gd name="adj" fmla="val 1975"/>
+            </a:avLst>
+          </a:prstGeom>
+          <a:solidFill>
+            <a:srgbClr val="FFFFFF">
+              <a:alpha val="0"/>
+            </a:srgbClr>
           </a:solidFill>
           <a:ln w="9525">
             <a:solidFill>
@@ -3231,14 +3138,14 @@
       </p:sp>
       <p:sp>
         <p:nvSpPr>
-          <p:cNvPr id="11" name="Text 9"/>
-          <p:cNvSpPr/>
-          <p:nvPr/>
-        </p:nvSpPr>
-        <p:spPr>
-          <a:xfrm>
-            <a:off x="841248" y="3364992"/>
-            <a:ext cx="3108960" cy="256032"/>
+          <p:cNvPr id="13" name="Text 10"/>
+          <p:cNvSpPr/>
+          <p:nvPr/>
+        </p:nvSpPr>
+        <p:spPr>
+          <a:xfrm>
+            <a:off x="548640" y="6446520"/>
+            <a:ext cx="7315200" cy="228600"/>
           </a:xfrm>
           <a:prstGeom prst="rect">
             <a:avLst/>
@@ -3254,435 +3161,15 @@
               <a:buNone/>
             </a:pPr>
             <a:r>
-              <a:rPr lang="en-US" sz="850" b="1" spc="200" kern="0" dirty="0">
-                <a:solidFill>
-                  <a:srgbClr val="00D1FF"/>
+              <a:rPr lang="en-US" sz="800" dirty="0">
+                <a:solidFill>
+                  <a:srgbClr val="6B7393"/>
                 </a:solidFill>
                 <a:latin typeface="JetBrains Mono" pitchFamily="34" charset="0"/>
                 <a:ea typeface="JetBrains Mono" pitchFamily="34" charset="-122"/>
                 <a:cs typeface="JetBrains Mono" pitchFamily="34" charset="-120"/>
               </a:rPr>
-              <a:t>PAY-PER-USE APIS</a:t>
-            </a:r>
-            <a:endParaRPr lang="en-US" sz="850" dirty="0"/>
-          </a:p>
-        </p:txBody>
-      </p:sp>
-      <p:sp>
-        <p:nvSpPr>
-          <p:cNvPr id="12" name="Text 10"/>
-          <p:cNvSpPr/>
-          <p:nvPr/>
-        </p:nvSpPr>
-        <p:spPr>
-          <a:xfrm>
-            <a:off x="841248" y="3675888"/>
-            <a:ext cx="3108960" cy="548640"/>
-          </a:xfrm>
-          <a:prstGeom prst="rect">
-            <a:avLst/>
-          </a:prstGeom>
-          <a:noFill/>
-          <a:ln/>
-        </p:spPr>
-        <p:txBody>
-          <a:bodyPr wrap="square" lIns="0" tIns="0" rIns="0" bIns="0" rtlCol="0" anchor="ctr">
-            <a:normAutofit/>
-          </a:bodyPr>
-          <a:lstStyle/>
-          <a:p>
-            <a:pPr indent="0" marL="0">
-              <a:buNone/>
-            </a:pPr>
-            <a:r>
-              <a:rPr lang="en-US" sz="1800" b="1" dirty="0">
-                <a:solidFill>
-                  <a:srgbClr val="0B1020"/>
-                </a:solidFill>
-                <a:latin typeface="Inter" pitchFamily="34" charset="0"/>
-                <a:ea typeface="Inter" pitchFamily="34" charset="-122"/>
-                <a:cs typeface="Inter" pitchFamily="34" charset="-120"/>
-              </a:rPr>
-              <a:t>pay.sh</a:t>
-            </a:r>
-            <a:endParaRPr lang="en-US" sz="1800" dirty="0"/>
-          </a:p>
-        </p:txBody>
-      </p:sp>
-      <p:sp>
-        <p:nvSpPr>
-          <p:cNvPr id="13" name="Text 11"/>
-          <p:cNvSpPr/>
-          <p:nvPr/>
-        </p:nvSpPr>
-        <p:spPr>
-          <a:xfrm>
-            <a:off x="841248" y="4251960"/>
-            <a:ext cx="3108960" cy="1417320"/>
-          </a:xfrm>
-          <a:prstGeom prst="rect">
-            <a:avLst/>
-          </a:prstGeom>
-          <a:noFill/>
-          <a:ln/>
-        </p:spPr>
-        <p:txBody>
-          <a:bodyPr wrap="square" lIns="0" tIns="0" rIns="0" bIns="0" rtlCol="0" anchor="t"/>
-          <a:lstStyle/>
-          <a:p>
-            <a:pPr indent="0" marL="0">
-              <a:spcAft>
-                <a:spcPts val="400"/>
-              </a:spcAft>
-              <a:buNone/>
-            </a:pPr>
-            <a:r>
-              <a:rPr lang="en-US" sz="1200" dirty="0">
-                <a:solidFill>
-                  <a:srgbClr val="2B3556"/>
-                </a:solidFill>
-                <a:latin typeface="Inter" pitchFamily="34" charset="0"/>
-                <a:ea typeface="Inter" pitchFamily="34" charset="-122"/>
-                <a:cs typeface="Inter" pitchFamily="34" charset="-120"/>
-              </a:rPr>
-              <a:t>Catalogs APIs that agents can call without accounts, keys, or subscriptions.</a:t>
-            </a:r>
-            <a:endParaRPr lang="en-US" sz="1200" dirty="0"/>
-          </a:p>
-        </p:txBody>
-      </p:sp>
-      <p:sp>
-        <p:nvSpPr>
-          <p:cNvPr id="14" name="Shape 12"/>
-          <p:cNvSpPr/>
-          <p:nvPr/>
-        </p:nvSpPr>
-        <p:spPr>
-          <a:xfrm>
-            <a:off x="4343400" y="3108960"/>
-            <a:ext cx="3657600" cy="2743200"/>
-          </a:xfrm>
-          <a:prstGeom prst="roundRect">
-            <a:avLst>
-              <a:gd name="adj" fmla="val 2667"/>
-            </a:avLst>
-          </a:prstGeom>
-          <a:solidFill>
-            <a:srgbClr val="FFFFFF"/>
-          </a:solidFill>
-          <a:ln w="9525">
-            <a:solidFill>
-              <a:srgbClr val="E6E8F0"/>
-            </a:solidFill>
-            <a:prstDash val="solid"/>
-          </a:ln>
-        </p:spPr>
-      </p:sp>
-      <p:sp>
-        <p:nvSpPr>
-          <p:cNvPr id="15" name="Text 13"/>
-          <p:cNvSpPr/>
-          <p:nvPr/>
-        </p:nvSpPr>
-        <p:spPr>
-          <a:xfrm>
-            <a:off x="4636008" y="3364992"/>
-            <a:ext cx="3108960" cy="256032"/>
-          </a:xfrm>
-          <a:prstGeom prst="rect">
-            <a:avLst/>
-          </a:prstGeom>
-          <a:noFill/>
-          <a:ln/>
-        </p:spPr>
-        <p:txBody>
-          <a:bodyPr wrap="square" lIns="0" tIns="0" rIns="0" bIns="0" rtlCol="0" anchor="ctr"/>
-          <a:lstStyle/>
-          <a:p>
-            <a:pPr indent="0" marL="0">
-              <a:buNone/>
-            </a:pPr>
-            <a:r>
-              <a:rPr lang="en-US" sz="850" b="1" spc="200" kern="0" dirty="0">
-                <a:solidFill>
-                  <a:srgbClr val="9945FF"/>
-                </a:solidFill>
-                <a:latin typeface="JetBrains Mono" pitchFamily="34" charset="0"/>
-                <a:ea typeface="JetBrains Mono" pitchFamily="34" charset="-122"/>
-                <a:cs typeface="JetBrains Mono" pitchFamily="34" charset="-120"/>
-              </a:rPr>
-              <a:t>HTTP 402 PRIMITIVE</a:t>
-            </a:r>
-            <a:endParaRPr lang="en-US" sz="850" dirty="0"/>
-          </a:p>
-        </p:txBody>
-      </p:sp>
-      <p:sp>
-        <p:nvSpPr>
-          <p:cNvPr id="16" name="Text 14"/>
-          <p:cNvSpPr/>
-          <p:nvPr/>
-        </p:nvSpPr>
-        <p:spPr>
-          <a:xfrm>
-            <a:off x="4636008" y="3675888"/>
-            <a:ext cx="3108960" cy="548640"/>
-          </a:xfrm>
-          <a:prstGeom prst="rect">
-            <a:avLst/>
-          </a:prstGeom>
-          <a:noFill/>
-          <a:ln/>
-        </p:spPr>
-        <p:txBody>
-          <a:bodyPr wrap="square" lIns="0" tIns="0" rIns="0" bIns="0" rtlCol="0" anchor="ctr">
-            <a:normAutofit/>
-          </a:bodyPr>
-          <a:lstStyle/>
-          <a:p>
-            <a:pPr indent="0" marL="0">
-              <a:buNone/>
-            </a:pPr>
-            <a:r>
-              <a:rPr lang="en-US" sz="1800" b="1" dirty="0">
-                <a:solidFill>
-                  <a:srgbClr val="0B1020"/>
-                </a:solidFill>
-                <a:latin typeface="Inter" pitchFamily="34" charset="0"/>
-                <a:ea typeface="Inter" pitchFamily="34" charset="-122"/>
-                <a:cs typeface="Inter" pitchFamily="34" charset="-120"/>
-              </a:rPr>
-              <a:t>x402</a:t>
-            </a:r>
-            <a:endParaRPr lang="en-US" sz="1800" dirty="0"/>
-          </a:p>
-        </p:txBody>
-      </p:sp>
-      <p:sp>
-        <p:nvSpPr>
-          <p:cNvPr id="17" name="Text 15"/>
-          <p:cNvSpPr/>
-          <p:nvPr/>
-        </p:nvSpPr>
-        <p:spPr>
-          <a:xfrm>
-            <a:off x="4636008" y="4251960"/>
-            <a:ext cx="3108960" cy="1417320"/>
-          </a:xfrm>
-          <a:prstGeom prst="rect">
-            <a:avLst/>
-          </a:prstGeom>
-          <a:noFill/>
-          <a:ln/>
-        </p:spPr>
-        <p:txBody>
-          <a:bodyPr wrap="square" lIns="0" tIns="0" rIns="0" bIns="0" rtlCol="0" anchor="t"/>
-          <a:lstStyle/>
-          <a:p>
-            <a:pPr indent="0" marL="0">
-              <a:spcAft>
-                <a:spcPts val="400"/>
-              </a:spcAft>
-              <a:buNone/>
-            </a:pPr>
-            <a:r>
-              <a:rPr lang="en-US" sz="1200" dirty="0">
-                <a:solidFill>
-                  <a:srgbClr val="2B3556"/>
-                </a:solidFill>
-                <a:latin typeface="Inter" pitchFamily="34" charset="0"/>
-                <a:ea typeface="Inter" pitchFamily="34" charset="-122"/>
-                <a:cs typeface="Inter" pitchFamily="34" charset="-120"/>
-              </a:rPr>
-              <a:t>Native machine-to-machine payment flow. Agents see a price, pay, and proceed.</a:t>
-            </a:r>
-            <a:endParaRPr lang="en-US" sz="1200" dirty="0"/>
-          </a:p>
-        </p:txBody>
-      </p:sp>
-      <p:sp>
-        <p:nvSpPr>
-          <p:cNvPr id="18" name="Shape 16"/>
-          <p:cNvSpPr/>
-          <p:nvPr/>
-        </p:nvSpPr>
-        <p:spPr>
-          <a:xfrm>
-            <a:off x="8138160" y="3108960"/>
-            <a:ext cx="3474720" cy="2743200"/>
-          </a:xfrm>
-          <a:prstGeom prst="roundRect">
-            <a:avLst>
-              <a:gd name="adj" fmla="val 2667"/>
-            </a:avLst>
-          </a:prstGeom>
-          <a:solidFill>
-            <a:srgbClr val="FFFFFF"/>
-          </a:solidFill>
-          <a:ln w="9525">
-            <a:solidFill>
-              <a:srgbClr val="E6E8F0"/>
-            </a:solidFill>
-            <a:prstDash val="solid"/>
-          </a:ln>
-        </p:spPr>
-      </p:sp>
-      <p:sp>
-        <p:nvSpPr>
-          <p:cNvPr id="19" name="Text 17"/>
-          <p:cNvSpPr/>
-          <p:nvPr/>
-        </p:nvSpPr>
-        <p:spPr>
-          <a:xfrm>
-            <a:off x="8430768" y="3364992"/>
-            <a:ext cx="2926080" cy="256032"/>
-          </a:xfrm>
-          <a:prstGeom prst="rect">
-            <a:avLst/>
-          </a:prstGeom>
-          <a:noFill/>
-          <a:ln/>
-        </p:spPr>
-        <p:txBody>
-          <a:bodyPr wrap="square" lIns="0" tIns="0" rIns="0" bIns="0" rtlCol="0" anchor="ctr"/>
-          <a:lstStyle/>
-          <a:p>
-            <a:pPr indent="0" marL="0">
-              <a:buNone/>
-            </a:pPr>
-            <a:r>
-              <a:rPr lang="en-US" sz="850" b="1" spc="200" kern="0" dirty="0">
-                <a:solidFill>
-                  <a:srgbClr val="047857"/>
-                </a:solidFill>
-                <a:latin typeface="JetBrains Mono" pitchFamily="34" charset="0"/>
-                <a:ea typeface="JetBrains Mono" pitchFamily="34" charset="-122"/>
-                <a:cs typeface="JetBrains Mono" pitchFamily="34" charset="-120"/>
-              </a:rPr>
-              <a:t>SETTLEMENT</a:t>
-            </a:r>
-            <a:endParaRPr lang="en-US" sz="850" dirty="0"/>
-          </a:p>
-        </p:txBody>
-      </p:sp>
-      <p:sp>
-        <p:nvSpPr>
-          <p:cNvPr id="20" name="Text 18"/>
-          <p:cNvSpPr/>
-          <p:nvPr/>
-        </p:nvSpPr>
-        <p:spPr>
-          <a:xfrm>
-            <a:off x="8430768" y="3675888"/>
-            <a:ext cx="2926080" cy="548640"/>
-          </a:xfrm>
-          <a:prstGeom prst="rect">
-            <a:avLst/>
-          </a:prstGeom>
-          <a:noFill/>
-          <a:ln/>
-        </p:spPr>
-        <p:txBody>
-          <a:bodyPr wrap="square" lIns="0" tIns="0" rIns="0" bIns="0" rtlCol="0" anchor="ctr">
-            <a:normAutofit/>
-          </a:bodyPr>
-          <a:lstStyle/>
-          <a:p>
-            <a:pPr indent="0" marL="0">
-              <a:buNone/>
-            </a:pPr>
-            <a:r>
-              <a:rPr lang="en-US" sz="1800" b="1" dirty="0">
-                <a:solidFill>
-                  <a:srgbClr val="0B1020"/>
-                </a:solidFill>
-                <a:latin typeface="Inter" pitchFamily="34" charset="0"/>
-                <a:ea typeface="Inter" pitchFamily="34" charset="-122"/>
-                <a:cs typeface="Inter" pitchFamily="34" charset="-120"/>
-              </a:rPr>
-              <a:t>Solana</a:t>
-            </a:r>
-            <a:endParaRPr lang="en-US" sz="1800" dirty="0"/>
-          </a:p>
-        </p:txBody>
-      </p:sp>
-      <p:sp>
-        <p:nvSpPr>
-          <p:cNvPr id="21" name="Text 19"/>
-          <p:cNvSpPr/>
-          <p:nvPr/>
-        </p:nvSpPr>
-        <p:spPr>
-          <a:xfrm>
-            <a:off x="8430768" y="4251960"/>
-            <a:ext cx="2926080" cy="1417320"/>
-          </a:xfrm>
-          <a:prstGeom prst="rect">
-            <a:avLst/>
-          </a:prstGeom>
-          <a:noFill/>
-          <a:ln/>
-        </p:spPr>
-        <p:txBody>
-          <a:bodyPr wrap="square" lIns="0" tIns="0" rIns="0" bIns="0" rtlCol="0" anchor="t"/>
-          <a:lstStyle/>
-          <a:p>
-            <a:pPr indent="0" marL="0">
-              <a:spcAft>
-                <a:spcPts val="400"/>
-              </a:spcAft>
-              <a:buNone/>
-            </a:pPr>
-            <a:r>
-              <a:rPr lang="en-US" sz="1200" dirty="0">
-                <a:solidFill>
-                  <a:srgbClr val="2B3556"/>
-                </a:solidFill>
-                <a:latin typeface="Inter" pitchFamily="34" charset="0"/>
-                <a:ea typeface="Inter" pitchFamily="34" charset="-122"/>
-                <a:cs typeface="Inter" pitchFamily="34" charset="-120"/>
-              </a:rPr>
-              <a:t>Low fees and fast confirmation make tiny, frequent agent payments practical.</a:t>
-            </a:r>
-            <a:endParaRPr lang="en-US" sz="1200" dirty="0"/>
-          </a:p>
-        </p:txBody>
-      </p:sp>
-      <p:sp>
-        <p:nvSpPr>
-          <p:cNvPr id="22" name="Text 20"/>
-          <p:cNvSpPr/>
-          <p:nvPr/>
-        </p:nvSpPr>
-        <p:spPr>
-          <a:xfrm>
-            <a:off x="548640" y="6446520"/>
-            <a:ext cx="7315200" cy="228600"/>
-          </a:xfrm>
-          <a:prstGeom prst="rect">
-            <a:avLst/>
-          </a:prstGeom>
-          <a:noFill/>
-          <a:ln/>
-        </p:spPr>
-        <p:txBody>
-          <a:bodyPr wrap="square" lIns="0" tIns="0" rIns="0" bIns="0" rtlCol="0" anchor="ctr"/>
-          <a:lstStyle/>
-          <a:p>
-            <a:pPr indent="0" marL="0">
-              <a:buNone/>
-            </a:pPr>
-            <a:r>
-              <a:rPr lang="en-US" sz="800" dirty="0">
-                <a:solidFill>
-                  <a:srgbClr val="6B7393"/>
-                </a:solidFill>
-                <a:latin typeface="JetBrains Mono" pitchFamily="34" charset="0"/>
-                <a:ea typeface="JetBrains Mono" pitchFamily="34" charset="-122"/>
-                <a:cs typeface="JetBrains Mono" pitchFamily="34" charset="-120"/>
-              </a:rPr>
-              <a:t>agentpass-guard · github.com/currentlycodinng/agentpass-guard</a:t>
+              <a:t>github.com/currentlycodinng/agentpass-guard</a:t>
             </a:r>
             <a:endParaRPr lang="en-US" sz="800" dirty="0"/>
           </a:p>
@@ -3690,7 +3177,7 @@
       </p:sp>
       <p:sp>
         <p:nvSpPr>
-          <p:cNvPr id="23" name="Text 21"/>
+          <p:cNvPr id="14" name="Text 11"/>
           <p:cNvSpPr/>
           <p:nvPr/>
         </p:nvSpPr>
@@ -3924,7 +3411,7 @@
                 <a:ea typeface="JetBrains Mono" pitchFamily="34" charset="-122"/>
                 <a:cs typeface="JetBrains Mono" pitchFamily="34" charset="-120"/>
               </a:rPr>
-              <a:t>THE PRODUCT</a:t>
+              <a:t>LIVE DEMO</a:t>
             </a:r>
             <a:endParaRPr lang="en-US" sz="850" dirty="0"/>
           </a:p>
@@ -3977,8 +3464,47 @@
         </p:nvSpPr>
         <p:spPr>
           <a:xfrm>
-            <a:off x="548640" y="1280160"/>
-            <a:ext cx="11064240" cy="1463040"/>
+            <a:off x="548640" y="1188720"/>
+            <a:ext cx="10972800" cy="274320"/>
+          </a:xfrm>
+          <a:prstGeom prst="rect">
+            <a:avLst/>
+          </a:prstGeom>
+          <a:noFill/>
+          <a:ln/>
+        </p:spPr>
+        <p:txBody>
+          <a:bodyPr wrap="square" lIns="0" tIns="0" rIns="0" bIns="0" rtlCol="0" anchor="ctr"/>
+          <a:lstStyle/>
+          <a:p>
+            <a:pPr indent="0" marL="0">
+              <a:buNone/>
+            </a:pPr>
+            <a:r>
+              <a:rPr lang="en-US" sz="900" b="1" spc="200" kern="0" dirty="0">
+                <a:solidFill>
+                  <a:srgbClr val="6B7393"/>
+                </a:solidFill>
+                <a:latin typeface="JetBrains Mono" pitchFamily="34" charset="0"/>
+                <a:ea typeface="JetBrains Mono" pitchFamily="34" charset="-122"/>
+                <a:cs typeface="JetBrains Mono" pitchFamily="34" charset="-120"/>
+              </a:rPr>
+              <a:t>HOW IT RUNS</a:t>
+            </a:r>
+            <a:endParaRPr lang="en-US" sz="900" dirty="0"/>
+          </a:p>
+        </p:txBody>
+      </p:sp>
+      <p:sp>
+        <p:nvSpPr>
+          <p:cNvPr id="9" name="Text 7"/>
+          <p:cNvSpPr/>
+          <p:nvPr/>
+        </p:nvSpPr>
+        <p:spPr>
+          <a:xfrm>
+            <a:off x="548640" y="1481328"/>
+            <a:ext cx="11064240" cy="640080"/>
           </a:xfrm>
           <a:prstGeom prst="rect">
             <a:avLst/>
@@ -3996,7 +3522,7 @@
               <a:buNone/>
             </a:pPr>
             <a:r>
-              <a:rPr lang="en-US" sz="3600" b="1" dirty="0">
+              <a:rPr lang="en-US" sz="2600" b="1" dirty="0">
                 <a:solidFill>
                   <a:srgbClr val="0B1020"/>
                 </a:solidFill>
@@ -4004,30 +3530,86 @@
                 <a:ea typeface="Inter" pitchFamily="34" charset="-122"/>
                 <a:cs typeface="Inter" pitchFamily="34" charset="-120"/>
               </a:rPr>
-              <a:t>A guardrail check before every paid action.</a:t>
-            </a:r>
-            <a:endParaRPr lang="en-US" sz="3600" dirty="0"/>
-          </a:p>
-        </p:txBody>
-      </p:sp>
-      <p:sp>
-        <p:nvSpPr>
-          <p:cNvPr id="9" name="Shape 7"/>
-          <p:cNvSpPr/>
-          <p:nvPr/>
-        </p:nvSpPr>
-        <p:spPr>
-          <a:xfrm>
-            <a:off x="609448" y="2834640"/>
-            <a:ext cx="2606040" cy="1463040"/>
+              <a:t>Set a policy. Watch the agent get checked. Three actions, three traces.</a:t>
+            </a:r>
+            <a:endParaRPr lang="en-US" sz="2600" dirty="0"/>
+          </a:p>
+        </p:txBody>
+      </p:sp>
+      <p:sp>
+        <p:nvSpPr>
+          <p:cNvPr id="10" name="Shape 8"/>
+          <p:cNvSpPr/>
+          <p:nvPr/>
+        </p:nvSpPr>
+        <p:spPr>
+          <a:xfrm>
+            <a:off x="594360" y="2496312"/>
+            <a:ext cx="11064240" cy="3703320"/>
           </a:xfrm>
           <a:prstGeom prst="roundRect">
             <a:avLst>
-              <a:gd name="adj" fmla="val 5000"/>
+              <a:gd name="adj" fmla="val 1975"/>
             </a:avLst>
           </a:prstGeom>
           <a:solidFill>
-            <a:srgbClr val="FFFFFF"/>
+            <a:srgbClr val="0B1020">
+              <a:alpha val="8000"/>
+            </a:srgbClr>
+          </a:solidFill>
+          <a:ln w="12700">
+            <a:solidFill>
+              <a:srgbClr val="0B1020">
+                <a:alpha val="8000"/>
+              </a:srgbClr>
+            </a:solidFill>
+            <a:prstDash val="solid"/>
+          </a:ln>
+        </p:spPr>
+      </p:sp>
+      <p:pic>
+        <p:nvPicPr>
+          <p:cNvPr id="11" name="Image 0" descr="assets/screenshots/03-demo.png">    </p:cNvPr>
+          <p:cNvPicPr>
+            <a:picLocks noChangeAspect="1"/>
+          </p:cNvPicPr>
+          <p:nvPr/>
+        </p:nvPicPr>
+        <p:blipFill>
+          <a:blip r:embed="rId1"/>
+          <a:srcRect l="0" r="0" t="0" b="0"/>
+          <a:stretch/>
+        </p:blipFill>
+        <p:spPr>
+          <a:xfrm>
+            <a:off x="548640" y="2423160"/>
+            <a:ext cx="11064240" cy="3703320"/>
+          </a:xfrm>
+          <a:prstGeom prst="rect">
+            <a:avLst/>
+          </a:prstGeom>
+        </p:spPr>
+      </p:pic>
+      <p:sp>
+        <p:nvSpPr>
+          <p:cNvPr id="12" name="Shape 9"/>
+          <p:cNvSpPr/>
+          <p:nvPr/>
+        </p:nvSpPr>
+        <p:spPr>
+          <a:xfrm>
+            <a:off x="548640" y="2423160"/>
+            <a:ext cx="11064240" cy="3703320"/>
+          </a:xfrm>
+          <a:prstGeom prst="roundRect">
+            <a:avLst>
+              <a:gd name="adj" fmla="val 1975"/>
+            </a:avLst>
+          </a:prstGeom>
+          <a:solidFill>
+            <a:srgbClr val="FFFFFF">
+              <a:alpha val="0"/>
+            </a:srgbClr>
           </a:solidFill>
           <a:ln w="9525">
             <a:solidFill>
@@ -4039,14 +3621,14 @@
       </p:sp>
       <p:sp>
         <p:nvSpPr>
-          <p:cNvPr id="10" name="Text 8"/>
-          <p:cNvSpPr/>
-          <p:nvPr/>
-        </p:nvSpPr>
-        <p:spPr>
-          <a:xfrm>
-            <a:off x="883768" y="3108960"/>
-            <a:ext cx="1097280" cy="274320"/>
+          <p:cNvPr id="13" name="Text 10"/>
+          <p:cNvSpPr/>
+          <p:nvPr/>
+        </p:nvSpPr>
+        <p:spPr>
+          <a:xfrm>
+            <a:off x="548640" y="6446520"/>
+            <a:ext cx="7315200" cy="228600"/>
           </a:xfrm>
           <a:prstGeom prst="rect">
             <a:avLst/>
@@ -4062,602 +3644,15 @@
               <a:buNone/>
             </a:pPr>
             <a:r>
-              <a:rPr lang="en-US" sz="950" b="1" spc="150" kern="0" dirty="0">
-                <a:solidFill>
-                  <a:srgbClr val="00D1FF"/>
+              <a:rPr lang="en-US" sz="800" dirty="0">
+                <a:solidFill>
+                  <a:srgbClr val="6B7393"/>
                 </a:solidFill>
                 <a:latin typeface="JetBrains Mono" pitchFamily="34" charset="0"/>
                 <a:ea typeface="JetBrains Mono" pitchFamily="34" charset="-122"/>
                 <a:cs typeface="JetBrains Mono" pitchFamily="34" charset="-120"/>
               </a:rPr>
-              <a:t>01</a:t>
-            </a:r>
-            <a:endParaRPr lang="en-US" sz="950" dirty="0"/>
-          </a:p>
-        </p:txBody>
-      </p:sp>
-      <p:sp>
-        <p:nvSpPr>
-          <p:cNvPr id="11" name="Text 9"/>
-          <p:cNvSpPr/>
-          <p:nvPr/>
-        </p:nvSpPr>
-        <p:spPr>
-          <a:xfrm>
-            <a:off x="883768" y="3474720"/>
-            <a:ext cx="2148840" cy="640080"/>
-          </a:xfrm>
-          <a:prstGeom prst="rect">
-            <a:avLst/>
-          </a:prstGeom>
-          <a:noFill/>
-          <a:ln/>
-        </p:spPr>
-        <p:txBody>
-          <a:bodyPr wrap="square" lIns="0" tIns="0" rIns="0" bIns="0" rtlCol="0" anchor="ctr">
-            <a:normAutofit/>
-          </a:bodyPr>
-          <a:lstStyle/>
-          <a:p>
-            <a:pPr indent="0" marL="0">
-              <a:buNone/>
-            </a:pPr>
-            <a:r>
-              <a:rPr lang="en-US" sz="1300" b="1" dirty="0">
-                <a:solidFill>
-                  <a:srgbClr val="0B1020"/>
-                </a:solidFill>
-                <a:latin typeface="Inter" pitchFamily="34" charset="0"/>
-                <a:ea typeface="Inter" pitchFamily="34" charset="-122"/>
-                <a:cs typeface="Inter" pitchFamily="34" charset="-120"/>
-              </a:rPr>
-              <a:t>Agent proposes paid call</a:t>
-            </a:r>
-            <a:endParaRPr lang="en-US" sz="1300" dirty="0"/>
-          </a:p>
-        </p:txBody>
-      </p:sp>
-      <p:sp>
-        <p:nvSpPr>
-          <p:cNvPr id="12" name="Shape 10"/>
-          <p:cNvSpPr/>
-          <p:nvPr/>
-        </p:nvSpPr>
-        <p:spPr>
-          <a:xfrm>
-            <a:off x="3215488" y="3566160"/>
-            <a:ext cx="182880" cy="0"/>
-          </a:xfrm>
-          <a:prstGeom prst="line">
-            <a:avLst/>
-          </a:prstGeom>
-          <a:noFill/>
-          <a:ln w="15240">
-            <a:solidFill>
-              <a:srgbClr val="D2D7E3"/>
-            </a:solidFill>
-            <a:prstDash val="solid"/>
-            <a:tailEnd type="triangle"/>
-          </a:ln>
-        </p:spPr>
-      </p:sp>
-      <p:sp>
-        <p:nvSpPr>
-          <p:cNvPr id="13" name="Shape 11"/>
-          <p:cNvSpPr/>
-          <p:nvPr/>
-        </p:nvSpPr>
-        <p:spPr>
-          <a:xfrm>
-            <a:off x="3398368" y="2834640"/>
-            <a:ext cx="2606040" cy="1463040"/>
-          </a:xfrm>
-          <a:prstGeom prst="roundRect">
-            <a:avLst>
-              <a:gd name="adj" fmla="val 5000"/>
-            </a:avLst>
-          </a:prstGeom>
-          <a:solidFill>
-            <a:srgbClr val="FFFFFF"/>
-          </a:solidFill>
-          <a:ln w="9525">
-            <a:solidFill>
-              <a:srgbClr val="E6E8F0"/>
-            </a:solidFill>
-            <a:prstDash val="solid"/>
-          </a:ln>
-        </p:spPr>
-      </p:sp>
-      <p:sp>
-        <p:nvSpPr>
-          <p:cNvPr id="14" name="Text 12"/>
-          <p:cNvSpPr/>
-          <p:nvPr/>
-        </p:nvSpPr>
-        <p:spPr>
-          <a:xfrm>
-            <a:off x="3672688" y="3108960"/>
-            <a:ext cx="1097280" cy="274320"/>
-          </a:xfrm>
-          <a:prstGeom prst="rect">
-            <a:avLst/>
-          </a:prstGeom>
-          <a:noFill/>
-          <a:ln/>
-        </p:spPr>
-        <p:txBody>
-          <a:bodyPr wrap="square" lIns="0" tIns="0" rIns="0" bIns="0" rtlCol="0" anchor="ctr"/>
-          <a:lstStyle/>
-          <a:p>
-            <a:pPr indent="0" marL="0">
-              <a:buNone/>
-            </a:pPr>
-            <a:r>
-              <a:rPr lang="en-US" sz="950" b="1" spc="150" kern="0" dirty="0">
-                <a:solidFill>
-                  <a:srgbClr val="9945FF"/>
-                </a:solidFill>
-                <a:latin typeface="JetBrains Mono" pitchFamily="34" charset="0"/>
-                <a:ea typeface="JetBrains Mono" pitchFamily="34" charset="-122"/>
-                <a:cs typeface="JetBrains Mono" pitchFamily="34" charset="-120"/>
-              </a:rPr>
-              <a:t>02</a:t>
-            </a:r>
-            <a:endParaRPr lang="en-US" sz="950" dirty="0"/>
-          </a:p>
-        </p:txBody>
-      </p:sp>
-      <p:sp>
-        <p:nvSpPr>
-          <p:cNvPr id="15" name="Text 13"/>
-          <p:cNvSpPr/>
-          <p:nvPr/>
-        </p:nvSpPr>
-        <p:spPr>
-          <a:xfrm>
-            <a:off x="3672688" y="3474720"/>
-            <a:ext cx="2148840" cy="640080"/>
-          </a:xfrm>
-          <a:prstGeom prst="rect">
-            <a:avLst/>
-          </a:prstGeom>
-          <a:noFill/>
-          <a:ln/>
-        </p:spPr>
-        <p:txBody>
-          <a:bodyPr wrap="square" lIns="0" tIns="0" rIns="0" bIns="0" rtlCol="0" anchor="ctr">
-            <a:normAutofit/>
-          </a:bodyPr>
-          <a:lstStyle/>
-          <a:p>
-            <a:pPr indent="0" marL="0">
-              <a:buNone/>
-            </a:pPr>
-            <a:r>
-              <a:rPr lang="en-US" sz="1300" b="1" dirty="0">
-                <a:solidFill>
-                  <a:srgbClr val="0B1020"/>
-                </a:solidFill>
-                <a:latin typeface="Inter" pitchFamily="34" charset="0"/>
-                <a:ea typeface="Inter" pitchFamily="34" charset="-122"/>
-                <a:cs typeface="Inter" pitchFamily="34" charset="-120"/>
-              </a:rPr>
-              <a:t>Policy evaluates &amp; explains</a:t>
-            </a:r>
-            <a:endParaRPr lang="en-US" sz="1300" dirty="0"/>
-          </a:p>
-        </p:txBody>
-      </p:sp>
-      <p:sp>
-        <p:nvSpPr>
-          <p:cNvPr id="16" name="Shape 14"/>
-          <p:cNvSpPr/>
-          <p:nvPr/>
-        </p:nvSpPr>
-        <p:spPr>
-          <a:xfrm>
-            <a:off x="6004408" y="3566160"/>
-            <a:ext cx="182880" cy="0"/>
-          </a:xfrm>
-          <a:prstGeom prst="line">
-            <a:avLst/>
-          </a:prstGeom>
-          <a:noFill/>
-          <a:ln w="15240">
-            <a:solidFill>
-              <a:srgbClr val="D2D7E3"/>
-            </a:solidFill>
-            <a:prstDash val="solid"/>
-            <a:tailEnd type="triangle"/>
-          </a:ln>
-        </p:spPr>
-      </p:sp>
-      <p:sp>
-        <p:nvSpPr>
-          <p:cNvPr id="17" name="Shape 15"/>
-          <p:cNvSpPr/>
-          <p:nvPr/>
-        </p:nvSpPr>
-        <p:spPr>
-          <a:xfrm>
-            <a:off x="6187288" y="2834640"/>
-            <a:ext cx="2606040" cy="1463040"/>
-          </a:xfrm>
-          <a:prstGeom prst="roundRect">
-            <a:avLst>
-              <a:gd name="adj" fmla="val 5000"/>
-            </a:avLst>
-          </a:prstGeom>
-          <a:solidFill>
-            <a:srgbClr val="FFFFFF"/>
-          </a:solidFill>
-          <a:ln w="9525">
-            <a:solidFill>
-              <a:srgbClr val="E6E8F0"/>
-            </a:solidFill>
-            <a:prstDash val="solid"/>
-          </a:ln>
-        </p:spPr>
-      </p:sp>
-      <p:sp>
-        <p:nvSpPr>
-          <p:cNvPr id="18" name="Text 16"/>
-          <p:cNvSpPr/>
-          <p:nvPr/>
-        </p:nvSpPr>
-        <p:spPr>
-          <a:xfrm>
-            <a:off x="6461608" y="3108960"/>
-            <a:ext cx="1097280" cy="274320"/>
-          </a:xfrm>
-          <a:prstGeom prst="rect">
-            <a:avLst/>
-          </a:prstGeom>
-          <a:noFill/>
-          <a:ln/>
-        </p:spPr>
-        <p:txBody>
-          <a:bodyPr wrap="square" lIns="0" tIns="0" rIns="0" bIns="0" rtlCol="0" anchor="ctr"/>
-          <a:lstStyle/>
-          <a:p>
-            <a:pPr indent="0" marL="0">
-              <a:buNone/>
-            </a:pPr>
-            <a:r>
-              <a:rPr lang="en-US" sz="950" b="1" spc="150" kern="0" dirty="0">
-                <a:solidFill>
-                  <a:srgbClr val="14F195"/>
-                </a:solidFill>
-                <a:latin typeface="JetBrains Mono" pitchFamily="34" charset="0"/>
-                <a:ea typeface="JetBrains Mono" pitchFamily="34" charset="-122"/>
-                <a:cs typeface="JetBrains Mono" pitchFamily="34" charset="-120"/>
-              </a:rPr>
-              <a:t>03</a:t>
-            </a:r>
-            <a:endParaRPr lang="en-US" sz="950" dirty="0"/>
-          </a:p>
-        </p:txBody>
-      </p:sp>
-      <p:sp>
-        <p:nvSpPr>
-          <p:cNvPr id="19" name="Text 17"/>
-          <p:cNvSpPr/>
-          <p:nvPr/>
-        </p:nvSpPr>
-        <p:spPr>
-          <a:xfrm>
-            <a:off x="6461608" y="3474720"/>
-            <a:ext cx="2148840" cy="640080"/>
-          </a:xfrm>
-          <a:prstGeom prst="rect">
-            <a:avLst/>
-          </a:prstGeom>
-          <a:noFill/>
-          <a:ln/>
-        </p:spPr>
-        <p:txBody>
-          <a:bodyPr wrap="square" lIns="0" tIns="0" rIns="0" bIns="0" rtlCol="0" anchor="ctr">
-            <a:normAutofit/>
-          </a:bodyPr>
-          <a:lstStyle/>
-          <a:p>
-            <a:pPr indent="0" marL="0">
-              <a:buNone/>
-            </a:pPr>
-            <a:r>
-              <a:rPr lang="en-US" sz="1300" b="1" dirty="0">
-                <a:solidFill>
-                  <a:srgbClr val="0B1020"/>
-                </a:solidFill>
-                <a:latin typeface="Inter" pitchFamily="34" charset="0"/>
-                <a:ea typeface="Inter" pitchFamily="34" charset="-122"/>
-                <a:cs typeface="Inter" pitchFamily="34" charset="-120"/>
-              </a:rPr>
-              <a:t>Solana payment settles</a:t>
-            </a:r>
-            <a:endParaRPr lang="en-US" sz="1300" dirty="0"/>
-          </a:p>
-        </p:txBody>
-      </p:sp>
-      <p:sp>
-        <p:nvSpPr>
-          <p:cNvPr id="20" name="Shape 18"/>
-          <p:cNvSpPr/>
-          <p:nvPr/>
-        </p:nvSpPr>
-        <p:spPr>
-          <a:xfrm>
-            <a:off x="8793328" y="3566160"/>
-            <a:ext cx="182880" cy="0"/>
-          </a:xfrm>
-          <a:prstGeom prst="line">
-            <a:avLst/>
-          </a:prstGeom>
-          <a:noFill/>
-          <a:ln w="15240">
-            <a:solidFill>
-              <a:srgbClr val="D2D7E3"/>
-            </a:solidFill>
-            <a:prstDash val="solid"/>
-            <a:tailEnd type="triangle"/>
-          </a:ln>
-        </p:spPr>
-      </p:sp>
-      <p:sp>
-        <p:nvSpPr>
-          <p:cNvPr id="21" name="Shape 19"/>
-          <p:cNvSpPr/>
-          <p:nvPr/>
-        </p:nvSpPr>
-        <p:spPr>
-          <a:xfrm>
-            <a:off x="8976208" y="2834640"/>
-            <a:ext cx="2606040" cy="1463040"/>
-          </a:xfrm>
-          <a:prstGeom prst="roundRect">
-            <a:avLst>
-              <a:gd name="adj" fmla="val 5000"/>
-            </a:avLst>
-          </a:prstGeom>
-          <a:solidFill>
-            <a:srgbClr val="FFFFFF"/>
-          </a:solidFill>
-          <a:ln w="9525">
-            <a:solidFill>
-              <a:srgbClr val="E6E8F0"/>
-            </a:solidFill>
-            <a:prstDash val="solid"/>
-          </a:ln>
-        </p:spPr>
-      </p:sp>
-      <p:sp>
-        <p:nvSpPr>
-          <p:cNvPr id="22" name="Text 20"/>
-          <p:cNvSpPr/>
-          <p:nvPr/>
-        </p:nvSpPr>
-        <p:spPr>
-          <a:xfrm>
-            <a:off x="9250528" y="3108960"/>
-            <a:ext cx="1097280" cy="274320"/>
-          </a:xfrm>
-          <a:prstGeom prst="rect">
-            <a:avLst/>
-          </a:prstGeom>
-          <a:noFill/>
-          <a:ln/>
-        </p:spPr>
-        <p:txBody>
-          <a:bodyPr wrap="square" lIns="0" tIns="0" rIns="0" bIns="0" rtlCol="0" anchor="ctr"/>
-          <a:lstStyle/>
-          <a:p>
-            <a:pPr indent="0" marL="0">
-              <a:buNone/>
-            </a:pPr>
-            <a:r>
-              <a:rPr lang="en-US" sz="950" b="1" spc="150" kern="0" dirty="0">
-                <a:solidFill>
-                  <a:srgbClr val="B45309"/>
-                </a:solidFill>
-                <a:latin typeface="JetBrains Mono" pitchFamily="34" charset="0"/>
-                <a:ea typeface="JetBrains Mono" pitchFamily="34" charset="-122"/>
-                <a:cs typeface="JetBrains Mono" pitchFamily="34" charset="-120"/>
-              </a:rPr>
-              <a:t>04</a:t>
-            </a:r>
-            <a:endParaRPr lang="en-US" sz="950" dirty="0"/>
-          </a:p>
-        </p:txBody>
-      </p:sp>
-      <p:sp>
-        <p:nvSpPr>
-          <p:cNvPr id="23" name="Text 21"/>
-          <p:cNvSpPr/>
-          <p:nvPr/>
-        </p:nvSpPr>
-        <p:spPr>
-          <a:xfrm>
-            <a:off x="9250528" y="3474720"/>
-            <a:ext cx="2148840" cy="640080"/>
-          </a:xfrm>
-          <a:prstGeom prst="rect">
-            <a:avLst/>
-          </a:prstGeom>
-          <a:noFill/>
-          <a:ln/>
-        </p:spPr>
-        <p:txBody>
-          <a:bodyPr wrap="square" lIns="0" tIns="0" rIns="0" bIns="0" rtlCol="0" anchor="ctr">
-            <a:normAutofit/>
-          </a:bodyPr>
-          <a:lstStyle/>
-          <a:p>
-            <a:pPr indent="0" marL="0">
-              <a:buNone/>
-            </a:pPr>
-            <a:r>
-              <a:rPr lang="en-US" sz="1300" b="1" dirty="0">
-                <a:solidFill>
-                  <a:srgbClr val="0B1020"/>
-                </a:solidFill>
-                <a:latin typeface="Inter" pitchFamily="34" charset="0"/>
-                <a:ea typeface="Inter" pitchFamily="34" charset="-122"/>
-                <a:cs typeface="Inter" pitchFamily="34" charset="-120"/>
-              </a:rPr>
-              <a:t>Receipt logs decision</a:t>
-            </a:r>
-            <a:endParaRPr lang="en-US" sz="1300" dirty="0"/>
-          </a:p>
-        </p:txBody>
-      </p:sp>
-      <p:sp>
-        <p:nvSpPr>
-          <p:cNvPr id="24" name="Text 22"/>
-          <p:cNvSpPr/>
-          <p:nvPr/>
-        </p:nvSpPr>
-        <p:spPr>
-          <a:xfrm>
-            <a:off x="548640" y="4663440"/>
-            <a:ext cx="11064240" cy="548640"/>
-          </a:xfrm>
-          <a:prstGeom prst="rect">
-            <a:avLst/>
-          </a:prstGeom>
-          <a:noFill/>
-          <a:ln/>
-        </p:spPr>
-        <p:txBody>
-          <a:bodyPr wrap="square" lIns="0" tIns="0" rIns="0" bIns="0" rtlCol="0" anchor="ctr"/>
-          <a:lstStyle/>
-          <a:p>
-            <a:pPr algn="ctr" indent="0" marL="0">
-              <a:buNone/>
-            </a:pPr>
-            <a:r>
-              <a:rPr lang="en-US" sz="1700" b="1" dirty="0">
-                <a:solidFill>
-                  <a:srgbClr val="2B3556"/>
-                </a:solidFill>
-                <a:latin typeface="Inter" pitchFamily="34" charset="0"/>
-                <a:ea typeface="Inter" pitchFamily="34" charset="-122"/>
-                <a:cs typeface="Inter" pitchFamily="34" charset="-120"/>
-              </a:rPr>
-              <a:t>Inside policy: auto-pay.   Outside policy: block, or pause for a human.</a:t>
-            </a:r>
-            <a:endParaRPr lang="en-US" sz="1700" dirty="0"/>
-          </a:p>
-        </p:txBody>
-      </p:sp>
-      <p:sp>
-        <p:nvSpPr>
-          <p:cNvPr id="25" name="Shape 23"/>
-          <p:cNvSpPr/>
-          <p:nvPr/>
-        </p:nvSpPr>
-        <p:spPr>
-          <a:xfrm>
-            <a:off x="548640" y="5532120"/>
-            <a:ext cx="3657600" cy="54864"/>
-          </a:xfrm>
-          <a:prstGeom prst="rect">
-            <a:avLst/>
-          </a:prstGeom>
-          <a:solidFill>
-            <a:srgbClr val="14F195"/>
-          </a:solidFill>
-          <a:ln w="12700">
-            <a:solidFill>
-              <a:srgbClr val="14F195"/>
-            </a:solidFill>
-            <a:prstDash val="solid"/>
-          </a:ln>
-        </p:spPr>
-      </p:sp>
-      <p:sp>
-        <p:nvSpPr>
-          <p:cNvPr id="26" name="Shape 24"/>
-          <p:cNvSpPr/>
-          <p:nvPr/>
-        </p:nvSpPr>
-        <p:spPr>
-          <a:xfrm>
-            <a:off x="4206240" y="5532120"/>
-            <a:ext cx="3657600" cy="54864"/>
-          </a:xfrm>
-          <a:prstGeom prst="rect">
-            <a:avLst/>
-          </a:prstGeom>
-          <a:solidFill>
-            <a:srgbClr val="00D1FF"/>
-          </a:solidFill>
-          <a:ln w="12700">
-            <a:solidFill>
-              <a:srgbClr val="00D1FF"/>
-            </a:solidFill>
-            <a:prstDash val="solid"/>
-          </a:ln>
-        </p:spPr>
-      </p:sp>
-      <p:sp>
-        <p:nvSpPr>
-          <p:cNvPr id="27" name="Shape 25"/>
-          <p:cNvSpPr/>
-          <p:nvPr/>
-        </p:nvSpPr>
-        <p:spPr>
-          <a:xfrm>
-            <a:off x="7863840" y="5532120"/>
-            <a:ext cx="3657600" cy="54864"/>
-          </a:xfrm>
-          <a:prstGeom prst="rect">
-            <a:avLst/>
-          </a:prstGeom>
-          <a:solidFill>
-            <a:srgbClr val="9945FF"/>
-          </a:solidFill>
-          <a:ln w="12700">
-            <a:solidFill>
-              <a:srgbClr val="9945FF"/>
-            </a:solidFill>
-            <a:prstDash val="solid"/>
-          </a:ln>
-        </p:spPr>
-      </p:sp>
-      <p:sp>
-        <p:nvSpPr>
-          <p:cNvPr id="28" name="Text 26"/>
-          <p:cNvSpPr/>
-          <p:nvPr/>
-        </p:nvSpPr>
-        <p:spPr>
-          <a:xfrm>
-            <a:off x="548640" y="6446520"/>
-            <a:ext cx="7315200" cy="228600"/>
-          </a:xfrm>
-          <a:prstGeom prst="rect">
-            <a:avLst/>
-          </a:prstGeom>
-          <a:noFill/>
-          <a:ln/>
-        </p:spPr>
-        <p:txBody>
-          <a:bodyPr wrap="square" lIns="0" tIns="0" rIns="0" bIns="0" rtlCol="0" anchor="ctr"/>
-          <a:lstStyle/>
-          <a:p>
-            <a:pPr indent="0" marL="0">
-              <a:buNone/>
-            </a:pPr>
-            <a:r>
-              <a:rPr lang="en-US" sz="800" dirty="0">
-                <a:solidFill>
-                  <a:srgbClr val="6B7393"/>
-                </a:solidFill>
-                <a:latin typeface="JetBrains Mono" pitchFamily="34" charset="0"/>
-                <a:ea typeface="JetBrains Mono" pitchFamily="34" charset="-122"/>
-                <a:cs typeface="JetBrains Mono" pitchFamily="34" charset="-120"/>
-              </a:rPr>
-              <a:t>agentpass-guard · github.com/currentlycodinng/agentpass-guard</a:t>
+              <a:t>github.com/currentlycodinng/agentpass-guard</a:t>
             </a:r>
             <a:endParaRPr lang="en-US" sz="800" dirty="0"/>
           </a:p>
@@ -4665,7 +3660,7 @@
       </p:sp>
       <p:sp>
         <p:nvSpPr>
-          <p:cNvPr id="29" name="Text 27"/>
+          <p:cNvPr id="14" name="Text 11"/>
           <p:cNvSpPr/>
           <p:nvPr/>
         </p:nvSpPr>
@@ -4899,7 +3894,7 @@
                 <a:ea typeface="JetBrains Mono" pitchFamily="34" charset="-122"/>
                 <a:cs typeface="JetBrains Mono" pitchFamily="34" charset="-120"/>
               </a:rPr>
-              <a:t>LIVE DEMO</a:t>
+              <a:t>THREE DECISIONS</a:t>
             </a:r>
             <a:endParaRPr lang="en-US" sz="850" dirty="0"/>
           </a:p>
@@ -4971,7 +3966,7 @@
               <a:buNone/>
             </a:pPr>
             <a:r>
-              <a:rPr lang="en-US" sz="3600" b="1" dirty="0">
+              <a:rPr lang="en-US" sz="3200" b="1" dirty="0">
                 <a:solidFill>
                   <a:srgbClr val="0B1020"/>
                 </a:solidFill>
@@ -4979,71 +3974,86 @@
                 <a:ea typeface="Inter" pitchFamily="34" charset="-122"/>
                 <a:cs typeface="Inter" pitchFamily="34" charset="-120"/>
               </a:rPr>
-              <a:t>Three decisions judges can inspect.</a:t>
-            </a:r>
-            <a:endParaRPr lang="en-US" sz="3600" dirty="0"/>
-          </a:p>
-        </p:txBody>
-      </p:sp>
-      <p:sp>
-        <p:nvSpPr>
-          <p:cNvPr id="9" name="Text 7"/>
-          <p:cNvSpPr/>
-          <p:nvPr/>
-        </p:nvSpPr>
-        <p:spPr>
-          <a:xfrm>
-            <a:off x="548640" y="2606040"/>
-            <a:ext cx="10058400" cy="914400"/>
-          </a:xfrm>
-          <a:prstGeom prst="rect">
-            <a:avLst/>
-          </a:prstGeom>
-          <a:noFill/>
-          <a:ln/>
-        </p:spPr>
-        <p:txBody>
-          <a:bodyPr wrap="square" lIns="0" tIns="0" rIns="0" bIns="0" rtlCol="0" anchor="ctr">
-            <a:normAutofit/>
-          </a:bodyPr>
-          <a:lstStyle/>
-          <a:p>
-            <a:pPr indent="0" marL="0">
-              <a:buNone/>
-            </a:pPr>
-            <a:r>
-              <a:rPr lang="en-US" sz="1400" dirty="0">
-                <a:solidFill>
-                  <a:srgbClr val="2B3556"/>
-                </a:solidFill>
-                <a:latin typeface="Inter" pitchFamily="34" charset="0"/>
-                <a:ea typeface="Inter" pitchFamily="34" charset="-122"/>
-                <a:cs typeface="Inter" pitchFamily="34" charset="-120"/>
-              </a:rPr>
-              <a:t>One scripted research agent. One human policy. Three actions, three different outcomes — each with the exact guardrail trace.</a:t>
-            </a:r>
-            <a:endParaRPr lang="en-US" sz="1400" dirty="0"/>
-          </a:p>
-        </p:txBody>
-      </p:sp>
-      <p:sp>
-        <p:nvSpPr>
-          <p:cNvPr id="10" name="Shape 8"/>
-          <p:cNvSpPr/>
-          <p:nvPr/>
-        </p:nvSpPr>
-        <p:spPr>
-          <a:xfrm>
-            <a:off x="548640" y="3657600"/>
-            <a:ext cx="3657600" cy="2468880"/>
+              <a:t>Approved. Blocked. Paused for human.</a:t>
+            </a:r>
+            <a:endParaRPr lang="en-US" sz="3200" dirty="0"/>
+          </a:p>
+        </p:txBody>
+      </p:sp>
+      <p:sp>
+        <p:nvSpPr>
+          <p:cNvPr id="9" name="Shape 7"/>
+          <p:cNvSpPr/>
+          <p:nvPr/>
+        </p:nvSpPr>
+        <p:spPr>
+          <a:xfrm>
+            <a:off x="490576" y="2359152"/>
+            <a:ext cx="3657600" cy="3108960"/>
           </a:xfrm>
           <a:prstGeom prst="roundRect">
             <a:avLst>
-              <a:gd name="adj" fmla="val 2963"/>
+              <a:gd name="adj" fmla="val 2353"/>
             </a:avLst>
           </a:prstGeom>
           <a:solidFill>
-            <a:srgbClr val="ECFDF5"/>
+            <a:srgbClr val="0B1020">
+              <a:alpha val="8000"/>
+            </a:srgbClr>
+          </a:solidFill>
+          <a:ln w="12700">
+            <a:solidFill>
+              <a:srgbClr val="0B1020">
+                <a:alpha val="8000"/>
+              </a:srgbClr>
+            </a:solidFill>
+            <a:prstDash val="solid"/>
+          </a:ln>
+        </p:spPr>
+      </p:sp>
+      <p:pic>
+        <p:nvPicPr>
+          <p:cNvPr id="10" name="Image 0" descr="assets/screenshots/07-decision-approved.png">    </p:cNvPr>
+          <p:cNvPicPr>
+            <a:picLocks noChangeAspect="1"/>
+          </p:cNvPicPr>
+          <p:nvPr/>
+        </p:nvPicPr>
+        <p:blipFill>
+          <a:blip r:embed="rId1"/>
+          <a:srcRect l="0" r="0" t="0" b="0"/>
+          <a:stretch/>
+        </p:blipFill>
+        <p:spPr>
+          <a:xfrm>
+            <a:off x="444856" y="2286000"/>
+            <a:ext cx="3657600" cy="3108960"/>
+          </a:xfrm>
+          <a:prstGeom prst="rect">
+            <a:avLst/>
+          </a:prstGeom>
+        </p:spPr>
+      </p:pic>
+      <p:sp>
+        <p:nvSpPr>
+          <p:cNvPr id="11" name="Shape 8"/>
+          <p:cNvSpPr/>
+          <p:nvPr/>
+        </p:nvSpPr>
+        <p:spPr>
+          <a:xfrm>
+            <a:off x="444856" y="2286000"/>
+            <a:ext cx="3657600" cy="3108960"/>
+          </a:xfrm>
+          <a:prstGeom prst="roundRect">
+            <a:avLst>
+              <a:gd name="adj" fmla="val 2353"/>
+            </a:avLst>
+          </a:prstGeom>
+          <a:solidFill>
+            <a:srgbClr val="FFFFFF">
+              <a:alpha val="0"/>
+            </a:srgbClr>
           </a:solidFill>
           <a:ln w="9525">
             <a:solidFill>
@@ -5055,144 +4065,78 @@
       </p:sp>
       <p:sp>
         <p:nvSpPr>
-          <p:cNvPr id="11" name="Text 9"/>
-          <p:cNvSpPr/>
-          <p:nvPr/>
-        </p:nvSpPr>
-        <p:spPr>
-          <a:xfrm>
-            <a:off x="841248" y="3913632"/>
-            <a:ext cx="3108960" cy="256032"/>
-          </a:xfrm>
-          <a:prstGeom prst="rect">
-            <a:avLst/>
-          </a:prstGeom>
-          <a:noFill/>
-          <a:ln/>
-        </p:spPr>
-        <p:txBody>
-          <a:bodyPr wrap="square" lIns="0" tIns="0" rIns="0" bIns="0" rtlCol="0" anchor="ctr"/>
-          <a:lstStyle/>
-          <a:p>
-            <a:pPr indent="0" marL="0">
-              <a:buNone/>
-            </a:pPr>
-            <a:r>
-              <a:rPr lang="en-US" sz="850" b="1" spc="200" kern="0" dirty="0">
-                <a:solidFill>
-                  <a:srgbClr val="047857"/>
-                </a:solidFill>
-                <a:latin typeface="JetBrains Mono" pitchFamily="34" charset="0"/>
-                <a:ea typeface="JetBrains Mono" pitchFamily="34" charset="-122"/>
-                <a:cs typeface="JetBrains Mono" pitchFamily="34" charset="-120"/>
-              </a:rPr>
-              <a:t>SHOULD APPROVE</a:t>
-            </a:r>
-            <a:endParaRPr lang="en-US" sz="850" dirty="0"/>
-          </a:p>
-        </p:txBody>
-      </p:sp>
-      <p:sp>
-        <p:nvSpPr>
-          <p:cNvPr id="12" name="Text 10"/>
-          <p:cNvSpPr/>
-          <p:nvPr/>
-        </p:nvSpPr>
-        <p:spPr>
-          <a:xfrm>
-            <a:off x="841248" y="4224528"/>
-            <a:ext cx="3108960" cy="548640"/>
-          </a:xfrm>
-          <a:prstGeom prst="rect">
-            <a:avLst/>
-          </a:prstGeom>
-          <a:noFill/>
-          <a:ln/>
-        </p:spPr>
-        <p:txBody>
-          <a:bodyPr wrap="square" lIns="0" tIns="0" rIns="0" bIns="0" rtlCol="0" anchor="ctr">
-            <a:normAutofit/>
-          </a:bodyPr>
-          <a:lstStyle/>
-          <a:p>
-            <a:pPr indent="0" marL="0">
-              <a:buNone/>
-            </a:pPr>
-            <a:r>
-              <a:rPr lang="en-US" sz="1800" b="1" dirty="0">
-                <a:solidFill>
-                  <a:srgbClr val="0B1020"/>
-                </a:solidFill>
-                <a:latin typeface="Inter" pitchFamily="34" charset="0"/>
-                <a:ea typeface="Inter" pitchFamily="34" charset="-122"/>
-                <a:cs typeface="Inter" pitchFamily="34" charset="-120"/>
-              </a:rPr>
-              <a:t>0.008 USDC research call</a:t>
-            </a:r>
-            <a:endParaRPr lang="en-US" sz="1800" dirty="0"/>
-          </a:p>
-        </p:txBody>
-      </p:sp>
-      <p:sp>
-        <p:nvSpPr>
-          <p:cNvPr id="13" name="Text 11"/>
-          <p:cNvSpPr/>
-          <p:nvPr/>
-        </p:nvSpPr>
-        <p:spPr>
-          <a:xfrm>
-            <a:off x="841248" y="4800600"/>
-            <a:ext cx="3108960" cy="1143000"/>
-          </a:xfrm>
-          <a:prstGeom prst="rect">
-            <a:avLst/>
-          </a:prstGeom>
-          <a:noFill/>
-          <a:ln/>
-        </p:spPr>
-        <p:txBody>
-          <a:bodyPr wrap="square" lIns="0" tIns="0" rIns="0" bIns="0" rtlCol="0" anchor="t"/>
-          <a:lstStyle/>
-          <a:p>
-            <a:pPr indent="0" marL="0">
-              <a:spcAft>
-                <a:spcPts val="400"/>
-              </a:spcAft>
-              <a:buNone/>
-            </a:pPr>
-            <a:r>
-              <a:rPr lang="en-US" sz="1200" dirty="0">
-                <a:solidFill>
-                  <a:srgbClr val="2B3556"/>
-                </a:solidFill>
-                <a:latin typeface="Inter" pitchFamily="34" charset="0"/>
-                <a:ea typeface="Inter" pitchFamily="34" charset="-122"/>
-                <a:cs typeface="Inter" pitchFamily="34" charset="-120"/>
-              </a:rPr>
-              <a:t>Allowlisted, under threshold, inside budget. Auto-approves and writes a receipt.</a:t>
-            </a:r>
-            <a:endParaRPr lang="en-US" sz="1200" dirty="0"/>
-          </a:p>
-        </p:txBody>
-      </p:sp>
-      <p:sp>
-        <p:nvSpPr>
-          <p:cNvPr id="14" name="Shape 12"/>
-          <p:cNvSpPr/>
-          <p:nvPr/>
-        </p:nvSpPr>
-        <p:spPr>
-          <a:xfrm>
-            <a:off x="4343400" y="3657600"/>
-            <a:ext cx="3657600" cy="2468880"/>
+          <p:cNvPr id="12" name="Shape 9"/>
+          <p:cNvSpPr/>
+          <p:nvPr/>
+        </p:nvSpPr>
+        <p:spPr>
+          <a:xfrm>
+            <a:off x="4312768" y="2359152"/>
+            <a:ext cx="3657600" cy="3108960"/>
           </a:xfrm>
           <a:prstGeom prst="roundRect">
             <a:avLst>
-              <a:gd name="adj" fmla="val 2963"/>
+              <a:gd name="adj" fmla="val 2353"/>
             </a:avLst>
           </a:prstGeom>
           <a:solidFill>
-            <a:srgbClr val="FEE2E2"/>
+            <a:srgbClr val="0B1020">
+              <a:alpha val="8000"/>
+            </a:srgbClr>
+          </a:solidFill>
+          <a:ln w="12700">
+            <a:solidFill>
+              <a:srgbClr val="0B1020">
+                <a:alpha val="8000"/>
+              </a:srgbClr>
+            </a:solidFill>
+            <a:prstDash val="solid"/>
+          </a:ln>
+        </p:spPr>
+      </p:sp>
+      <p:pic>
+        <p:nvPicPr>
+          <p:cNvPr id="13" name="Image 1" descr="assets/screenshots/08-decision-blocked.png">    </p:cNvPr>
+          <p:cNvPicPr>
+            <a:picLocks noChangeAspect="1"/>
+          </p:cNvPicPr>
+          <p:nvPr/>
+        </p:nvPicPr>
+        <p:blipFill>
+          <a:blip r:embed="rId2"/>
+          <a:srcRect l="0" r="0" t="0" b="0"/>
+          <a:stretch/>
+        </p:blipFill>
+        <p:spPr>
+          <a:xfrm>
+            <a:off x="4267048" y="2286000"/>
+            <a:ext cx="3657600" cy="3108960"/>
+          </a:xfrm>
+          <a:prstGeom prst="rect">
+            <a:avLst/>
+          </a:prstGeom>
+        </p:spPr>
+      </p:pic>
+      <p:sp>
+        <p:nvSpPr>
+          <p:cNvPr id="14" name="Shape 10"/>
+          <p:cNvSpPr/>
+          <p:nvPr/>
+        </p:nvSpPr>
+        <p:spPr>
+          <a:xfrm>
+            <a:off x="4267048" y="2286000"/>
+            <a:ext cx="3657600" cy="3108960"/>
+          </a:xfrm>
+          <a:prstGeom prst="roundRect">
+            <a:avLst>
+              <a:gd name="adj" fmla="val 2353"/>
+            </a:avLst>
+          </a:prstGeom>
+          <a:solidFill>
+            <a:srgbClr val="FFFFFF">
+              <a:alpha val="0"/>
+            </a:srgbClr>
           </a:solidFill>
           <a:ln w="9525">
             <a:solidFill>
@@ -5204,144 +4148,78 @@
       </p:sp>
       <p:sp>
         <p:nvSpPr>
-          <p:cNvPr id="15" name="Text 13"/>
-          <p:cNvSpPr/>
-          <p:nvPr/>
-        </p:nvSpPr>
-        <p:spPr>
-          <a:xfrm>
-            <a:off x="4636008" y="3913632"/>
-            <a:ext cx="3108960" cy="256032"/>
-          </a:xfrm>
-          <a:prstGeom prst="rect">
-            <a:avLst/>
-          </a:prstGeom>
-          <a:noFill/>
-          <a:ln/>
-        </p:spPr>
-        <p:txBody>
-          <a:bodyPr wrap="square" lIns="0" tIns="0" rIns="0" bIns="0" rtlCol="0" anchor="ctr"/>
-          <a:lstStyle/>
-          <a:p>
-            <a:pPr indent="0" marL="0">
-              <a:buNone/>
-            </a:pPr>
-            <a:r>
-              <a:rPr lang="en-US" sz="850" b="1" spc="200" kern="0" dirty="0">
-                <a:solidFill>
-                  <a:srgbClr val="B42318"/>
-                </a:solidFill>
-                <a:latin typeface="JetBrains Mono" pitchFamily="34" charset="0"/>
-                <a:ea typeface="JetBrains Mono" pitchFamily="34" charset="-122"/>
-                <a:cs typeface="JetBrains Mono" pitchFamily="34" charset="-120"/>
-              </a:rPr>
-              <a:t>SHOULD BLOCK</a:t>
-            </a:r>
-            <a:endParaRPr lang="en-US" sz="850" dirty="0"/>
-          </a:p>
-        </p:txBody>
-      </p:sp>
-      <p:sp>
-        <p:nvSpPr>
-          <p:cNvPr id="16" name="Text 14"/>
-          <p:cNvSpPr/>
-          <p:nvPr/>
-        </p:nvSpPr>
-        <p:spPr>
-          <a:xfrm>
-            <a:off x="4636008" y="4224528"/>
-            <a:ext cx="3108960" cy="548640"/>
-          </a:xfrm>
-          <a:prstGeom prst="rect">
-            <a:avLst/>
-          </a:prstGeom>
-          <a:noFill/>
-          <a:ln/>
-        </p:spPr>
-        <p:txBody>
-          <a:bodyPr wrap="square" lIns="0" tIns="0" rIns="0" bIns="0" rtlCol="0" anchor="ctr">
-            <a:normAutofit/>
-          </a:bodyPr>
-          <a:lstStyle/>
-          <a:p>
-            <a:pPr indent="0" marL="0">
-              <a:buNone/>
-            </a:pPr>
-            <a:r>
-              <a:rPr lang="en-US" sz="1800" b="1" dirty="0">
-                <a:solidFill>
-                  <a:srgbClr val="0B1020"/>
-                </a:solidFill>
-                <a:latin typeface="Inter" pitchFamily="34" charset="0"/>
-                <a:ea typeface="Inter" pitchFamily="34" charset="-122"/>
-                <a:cs typeface="Inter" pitchFamily="34" charset="-120"/>
-              </a:rPr>
-              <a:t>Unapproved scraping vendor</a:t>
-            </a:r>
-            <a:endParaRPr lang="en-US" sz="1800" dirty="0"/>
-          </a:p>
-        </p:txBody>
-      </p:sp>
-      <p:sp>
-        <p:nvSpPr>
-          <p:cNvPr id="17" name="Text 15"/>
-          <p:cNvSpPr/>
-          <p:nvPr/>
-        </p:nvSpPr>
-        <p:spPr>
-          <a:xfrm>
-            <a:off x="4636008" y="4800600"/>
-            <a:ext cx="3108960" cy="1143000"/>
-          </a:xfrm>
-          <a:prstGeom prst="rect">
-            <a:avLst/>
-          </a:prstGeom>
-          <a:noFill/>
-          <a:ln/>
-        </p:spPr>
-        <p:txBody>
-          <a:bodyPr wrap="square" lIns="0" tIns="0" rIns="0" bIns="0" rtlCol="0" anchor="t"/>
-          <a:lstStyle/>
-          <a:p>
-            <a:pPr indent="0" marL="0">
-              <a:spcAft>
-                <a:spcPts val="400"/>
-              </a:spcAft>
-              <a:buNone/>
-            </a:pPr>
-            <a:r>
-              <a:rPr lang="en-US" sz="1200" dirty="0">
-                <a:solidFill>
-                  <a:srgbClr val="2B3556"/>
-                </a:solidFill>
-                <a:latin typeface="Inter" pitchFamily="34" charset="0"/>
-                <a:ea typeface="Inter" pitchFamily="34" charset="-122"/>
-                <a:cs typeface="Inter" pitchFamily="34" charset="-120"/>
-              </a:rPr>
-              <a:t>Allowlist check fails. Blocked before settlement. Zero lamports leave the wallet.</a:t>
-            </a:r>
-            <a:endParaRPr lang="en-US" sz="1200" dirty="0"/>
-          </a:p>
-        </p:txBody>
-      </p:sp>
-      <p:sp>
-        <p:nvSpPr>
-          <p:cNvPr id="18" name="Shape 16"/>
-          <p:cNvSpPr/>
-          <p:nvPr/>
-        </p:nvSpPr>
-        <p:spPr>
-          <a:xfrm>
-            <a:off x="8138160" y="3657600"/>
-            <a:ext cx="3474720" cy="2468880"/>
+          <p:cNvPr id="15" name="Shape 11"/>
+          <p:cNvSpPr/>
+          <p:nvPr/>
+        </p:nvSpPr>
+        <p:spPr>
+          <a:xfrm>
+            <a:off x="8134960" y="2359152"/>
+            <a:ext cx="3657600" cy="3108960"/>
           </a:xfrm>
           <a:prstGeom prst="roundRect">
             <a:avLst>
-              <a:gd name="adj" fmla="val 2963"/>
+              <a:gd name="adj" fmla="val 2353"/>
             </a:avLst>
           </a:prstGeom>
           <a:solidFill>
-            <a:srgbClr val="FEF3C7"/>
+            <a:srgbClr val="0B1020">
+              <a:alpha val="8000"/>
+            </a:srgbClr>
+          </a:solidFill>
+          <a:ln w="12700">
+            <a:solidFill>
+              <a:srgbClr val="0B1020">
+                <a:alpha val="8000"/>
+              </a:srgbClr>
+            </a:solidFill>
+            <a:prstDash val="solid"/>
+          </a:ln>
+        </p:spPr>
+      </p:sp>
+      <p:pic>
+        <p:nvPicPr>
+          <p:cNvPr id="16" name="Image 2" descr="assets/screenshots/09-decision-approval.png">    </p:cNvPr>
+          <p:cNvPicPr>
+            <a:picLocks noChangeAspect="1"/>
+          </p:cNvPicPr>
+          <p:nvPr/>
+        </p:nvPicPr>
+        <p:blipFill>
+          <a:blip r:embed="rId3"/>
+          <a:srcRect l="0" r="0" t="0" b="0"/>
+          <a:stretch/>
+        </p:blipFill>
+        <p:spPr>
+          <a:xfrm>
+            <a:off x="8089240" y="2286000"/>
+            <a:ext cx="3657600" cy="3108960"/>
+          </a:xfrm>
+          <a:prstGeom prst="rect">
+            <a:avLst/>
+          </a:prstGeom>
+        </p:spPr>
+      </p:pic>
+      <p:sp>
+        <p:nvSpPr>
+          <p:cNvPr id="17" name="Shape 12"/>
+          <p:cNvSpPr/>
+          <p:nvPr/>
+        </p:nvSpPr>
+        <p:spPr>
+          <a:xfrm>
+            <a:off x="8089240" y="2286000"/>
+            <a:ext cx="3657600" cy="3108960"/>
+          </a:xfrm>
+          <a:prstGeom prst="roundRect">
+            <a:avLst>
+              <a:gd name="adj" fmla="val 2353"/>
+            </a:avLst>
+          </a:prstGeom>
+          <a:solidFill>
+            <a:srgbClr val="FFFFFF">
+              <a:alpha val="0"/>
+            </a:srgbClr>
           </a:solidFill>
           <a:ln w="9525">
             <a:solidFill>
@@ -5353,14 +4231,14 @@
       </p:sp>
       <p:sp>
         <p:nvSpPr>
-          <p:cNvPr id="19" name="Text 17"/>
-          <p:cNvSpPr/>
-          <p:nvPr/>
-        </p:nvSpPr>
-        <p:spPr>
-          <a:xfrm>
-            <a:off x="8430768" y="3913632"/>
-            <a:ext cx="2926080" cy="256032"/>
+          <p:cNvPr id="18" name="Text 13"/>
+          <p:cNvSpPr/>
+          <p:nvPr/>
+        </p:nvSpPr>
+        <p:spPr>
+          <a:xfrm>
+            <a:off x="444856" y="5532120"/>
+            <a:ext cx="3657600" cy="228600"/>
           </a:xfrm>
           <a:prstGeom prst="rect">
             <a:avLst/>
@@ -5376,15 +4254,15 @@
               <a:buNone/>
             </a:pPr>
             <a:r>
-              <a:rPr lang="en-US" sz="850" b="1" spc="200" kern="0" dirty="0">
-                <a:solidFill>
-                  <a:srgbClr val="B45309"/>
+              <a:rPr lang="en-US" sz="850" b="1" spc="150" kern="0" dirty="0">
+                <a:solidFill>
+                  <a:srgbClr val="047857"/>
                 </a:solidFill>
                 <a:latin typeface="JetBrains Mono" pitchFamily="34" charset="0"/>
                 <a:ea typeface="JetBrains Mono" pitchFamily="34" charset="-122"/>
                 <a:cs typeface="JetBrains Mono" pitchFamily="34" charset="-120"/>
               </a:rPr>
-              <a:t>NEEDS APPROVAL</a:t>
+              <a:t>0.008 USDC</a:t>
             </a:r>
             <a:endParaRPr lang="en-US" sz="850" dirty="0"/>
           </a:p>
@@ -5392,32 +4270,30 @@
       </p:sp>
       <p:sp>
         <p:nvSpPr>
-          <p:cNvPr id="20" name="Text 18"/>
-          <p:cNvSpPr/>
-          <p:nvPr/>
-        </p:nvSpPr>
-        <p:spPr>
-          <a:xfrm>
-            <a:off x="8430768" y="4224528"/>
-            <a:ext cx="2926080" cy="548640"/>
-          </a:xfrm>
-          <a:prstGeom prst="rect">
-            <a:avLst/>
-          </a:prstGeom>
-          <a:noFill/>
-          <a:ln/>
-        </p:spPr>
-        <p:txBody>
-          <a:bodyPr wrap="square" lIns="0" tIns="0" rIns="0" bIns="0" rtlCol="0" anchor="ctr">
-            <a:normAutofit/>
-          </a:bodyPr>
+          <p:cNvPr id="19" name="Text 14"/>
+          <p:cNvSpPr/>
+          <p:nvPr/>
+        </p:nvSpPr>
+        <p:spPr>
+          <a:xfrm>
+            <a:off x="444856" y="5760720"/>
+            <a:ext cx="3657600" cy="365760"/>
+          </a:xfrm>
+          <a:prstGeom prst="rect">
+            <a:avLst/>
+          </a:prstGeom>
+          <a:noFill/>
+          <a:ln/>
+        </p:spPr>
+        <p:txBody>
+          <a:bodyPr wrap="square" lIns="0" tIns="0" rIns="0" bIns="0" rtlCol="0" anchor="ctr"/>
           <a:lstStyle/>
           <a:p>
             <a:pPr indent="0" marL="0">
               <a:buNone/>
             </a:pPr>
             <a:r>
-              <a:rPr lang="en-US" sz="1800" b="1" dirty="0">
+              <a:rPr lang="en-US" sz="1600" b="1" dirty="0">
                 <a:solidFill>
                   <a:srgbClr val="0B1020"/>
                 </a:solidFill>
@@ -5425,64 +4301,100 @@
                 <a:ea typeface="Inter" pitchFamily="34" charset="-122"/>
                 <a:cs typeface="Inter" pitchFamily="34" charset="-120"/>
               </a:rPr>
-              <a:t>0.075 USDC BigQuery call</a:t>
-            </a:r>
-            <a:endParaRPr lang="en-US" sz="1800" dirty="0"/>
-          </a:p>
-        </p:txBody>
-      </p:sp>
-      <p:sp>
-        <p:nvSpPr>
-          <p:cNvPr id="21" name="Text 19"/>
-          <p:cNvSpPr/>
-          <p:nvPr/>
-        </p:nvSpPr>
-        <p:spPr>
-          <a:xfrm>
-            <a:off x="8430768" y="4800600"/>
-            <a:ext cx="2926080" cy="1143000"/>
-          </a:xfrm>
-          <a:prstGeom prst="rect">
-            <a:avLst/>
-          </a:prstGeom>
-          <a:noFill/>
-          <a:ln/>
-        </p:spPr>
-        <p:txBody>
-          <a:bodyPr wrap="square" lIns="0" tIns="0" rIns="0" bIns="0" rtlCol="0" anchor="t"/>
+              <a:t>Auto-approved</a:t>
+            </a:r>
+            <a:endParaRPr lang="en-US" sz="1600" dirty="0"/>
+          </a:p>
+        </p:txBody>
+      </p:sp>
+      <p:sp>
+        <p:nvSpPr>
+          <p:cNvPr id="20" name="Text 15"/>
+          <p:cNvSpPr/>
+          <p:nvPr/>
+        </p:nvSpPr>
+        <p:spPr>
+          <a:xfrm>
+            <a:off x="4267048" y="5532120"/>
+            <a:ext cx="3657600" cy="228600"/>
+          </a:xfrm>
+          <a:prstGeom prst="rect">
+            <a:avLst/>
+          </a:prstGeom>
+          <a:noFill/>
+          <a:ln/>
+        </p:spPr>
+        <p:txBody>
+          <a:bodyPr wrap="square" lIns="0" tIns="0" rIns="0" bIns="0" rtlCol="0" anchor="ctr"/>
           <a:lstStyle/>
           <a:p>
             <a:pPr indent="0" marL="0">
-              <a:spcAft>
-                <a:spcPts val="400"/>
-              </a:spcAft>
-              <a:buNone/>
-            </a:pPr>
-            <a:r>
-              <a:rPr lang="en-US" sz="1200" dirty="0">
-                <a:solidFill>
-                  <a:srgbClr val="2B3556"/>
+              <a:buNone/>
+            </a:pPr>
+            <a:r>
+              <a:rPr lang="en-US" sz="850" b="1" spc="150" kern="0" dirty="0">
+                <a:solidFill>
+                  <a:srgbClr val="B42318"/>
+                </a:solidFill>
+                <a:latin typeface="JetBrains Mono" pitchFamily="34" charset="0"/>
+                <a:ea typeface="JetBrains Mono" pitchFamily="34" charset="-122"/>
+                <a:cs typeface="JetBrains Mono" pitchFamily="34" charset="-120"/>
+              </a:rPr>
+              <a:t>ALLOWLIST FAIL</a:t>
+            </a:r>
+            <a:endParaRPr lang="en-US" sz="850" dirty="0"/>
+          </a:p>
+        </p:txBody>
+      </p:sp>
+      <p:sp>
+        <p:nvSpPr>
+          <p:cNvPr id="21" name="Text 16"/>
+          <p:cNvSpPr/>
+          <p:nvPr/>
+        </p:nvSpPr>
+        <p:spPr>
+          <a:xfrm>
+            <a:off x="4267048" y="5760720"/>
+            <a:ext cx="3657600" cy="365760"/>
+          </a:xfrm>
+          <a:prstGeom prst="rect">
+            <a:avLst/>
+          </a:prstGeom>
+          <a:noFill/>
+          <a:ln/>
+        </p:spPr>
+        <p:txBody>
+          <a:bodyPr wrap="square" lIns="0" tIns="0" rIns="0" bIns="0" rtlCol="0" anchor="ctr"/>
+          <a:lstStyle/>
+          <a:p>
+            <a:pPr indent="0" marL="0">
+              <a:buNone/>
+            </a:pPr>
+            <a:r>
+              <a:rPr lang="en-US" sz="1600" b="1" dirty="0">
+                <a:solidFill>
+                  <a:srgbClr val="0B1020"/>
                 </a:solidFill>
                 <a:latin typeface="Inter" pitchFamily="34" charset="0"/>
                 <a:ea typeface="Inter" pitchFamily="34" charset="-122"/>
                 <a:cs typeface="Inter" pitchFamily="34" charset="-120"/>
               </a:rPr>
-              <a:t>Allowlisted but above the 0.02 USDC threshold. Pauses for human approval.</a:t>
-            </a:r>
-            <a:endParaRPr lang="en-US" sz="1200" dirty="0"/>
-          </a:p>
-        </p:txBody>
-      </p:sp>
-      <p:sp>
-        <p:nvSpPr>
-          <p:cNvPr id="22" name="Text 20"/>
-          <p:cNvSpPr/>
-          <p:nvPr/>
-        </p:nvSpPr>
-        <p:spPr>
-          <a:xfrm>
-            <a:off x="548640" y="6446520"/>
-            <a:ext cx="7315200" cy="228600"/>
+              <a:t>Blocked</a:t>
+            </a:r>
+            <a:endParaRPr lang="en-US" sz="1600" dirty="0"/>
+          </a:p>
+        </p:txBody>
+      </p:sp>
+      <p:sp>
+        <p:nvSpPr>
+          <p:cNvPr id="22" name="Text 17"/>
+          <p:cNvSpPr/>
+          <p:nvPr/>
+        </p:nvSpPr>
+        <p:spPr>
+          <a:xfrm>
+            <a:off x="8089240" y="5532120"/>
+            <a:ext cx="3657600" cy="228600"/>
           </a:xfrm>
           <a:prstGeom prst="rect">
             <a:avLst/>
@@ -5498,15 +4410,93 @@
               <a:buNone/>
             </a:pPr>
             <a:r>
-              <a:rPr lang="en-US" sz="800" dirty="0">
-                <a:solidFill>
-                  <a:srgbClr val="6B7393"/>
+              <a:rPr lang="en-US" sz="850" b="1" spc="150" kern="0" dirty="0">
+                <a:solidFill>
+                  <a:srgbClr val="B45309"/>
                 </a:solidFill>
                 <a:latin typeface="JetBrains Mono" pitchFamily="34" charset="0"/>
                 <a:ea typeface="JetBrains Mono" pitchFamily="34" charset="-122"/>
                 <a:cs typeface="JetBrains Mono" pitchFamily="34" charset="-120"/>
               </a:rPr>
-              <a:t>agentpass-guard · github.com/currentlycodinng/agentpass-guard</a:t>
+              <a:t>0.075 USDC</a:t>
+            </a:r>
+            <a:endParaRPr lang="en-US" sz="850" dirty="0"/>
+          </a:p>
+        </p:txBody>
+      </p:sp>
+      <p:sp>
+        <p:nvSpPr>
+          <p:cNvPr id="23" name="Text 18"/>
+          <p:cNvSpPr/>
+          <p:nvPr/>
+        </p:nvSpPr>
+        <p:spPr>
+          <a:xfrm>
+            <a:off x="8089240" y="5760720"/>
+            <a:ext cx="3657600" cy="365760"/>
+          </a:xfrm>
+          <a:prstGeom prst="rect">
+            <a:avLst/>
+          </a:prstGeom>
+          <a:noFill/>
+          <a:ln/>
+        </p:spPr>
+        <p:txBody>
+          <a:bodyPr wrap="square" lIns="0" tIns="0" rIns="0" bIns="0" rtlCol="0" anchor="ctr"/>
+          <a:lstStyle/>
+          <a:p>
+            <a:pPr indent="0" marL="0">
+              <a:buNone/>
+            </a:pPr>
+            <a:r>
+              <a:rPr lang="en-US" sz="1600" b="1" dirty="0">
+                <a:solidFill>
+                  <a:srgbClr val="0B1020"/>
+                </a:solidFill>
+                <a:latin typeface="Inter" pitchFamily="34" charset="0"/>
+                <a:ea typeface="Inter" pitchFamily="34" charset="-122"/>
+                <a:cs typeface="Inter" pitchFamily="34" charset="-120"/>
+              </a:rPr>
+              <a:t>Needs human</a:t>
+            </a:r>
+            <a:endParaRPr lang="en-US" sz="1600" dirty="0"/>
+          </a:p>
+        </p:txBody>
+      </p:sp>
+      <p:sp>
+        <p:nvSpPr>
+          <p:cNvPr id="24" name="Text 19"/>
+          <p:cNvSpPr/>
+          <p:nvPr/>
+        </p:nvSpPr>
+        <p:spPr>
+          <a:xfrm>
+            <a:off x="548640" y="6446520"/>
+            <a:ext cx="7315200" cy="228600"/>
+          </a:xfrm>
+          <a:prstGeom prst="rect">
+            <a:avLst/>
+          </a:prstGeom>
+          <a:noFill/>
+          <a:ln/>
+        </p:spPr>
+        <p:txBody>
+          <a:bodyPr wrap="square" lIns="0" tIns="0" rIns="0" bIns="0" rtlCol="0" anchor="ctr"/>
+          <a:lstStyle/>
+          <a:p>
+            <a:pPr indent="0" marL="0">
+              <a:buNone/>
+            </a:pPr>
+            <a:r>
+              <a:rPr lang="en-US" sz="800" dirty="0">
+                <a:solidFill>
+                  <a:srgbClr val="6B7393"/>
+                </a:solidFill>
+                <a:latin typeface="JetBrains Mono" pitchFamily="34" charset="0"/>
+                <a:ea typeface="JetBrains Mono" pitchFamily="34" charset="-122"/>
+                <a:cs typeface="JetBrains Mono" pitchFamily="34" charset="-120"/>
+              </a:rPr>
+              <a:t>github.com/currentlycodinng/agentpass-guard</a:t>
             </a:r>
             <a:endParaRPr lang="en-US" sz="800" dirty="0"/>
           </a:p>
@@ -5514,7 +4504,7 @@
       </p:sp>
       <p:sp>
         <p:nvSpPr>
-          <p:cNvPr id="23" name="Text 21"/>
+          <p:cNvPr id="25" name="Text 20"/>
           <p:cNvSpPr/>
           <p:nvPr/>
         </p:nvSpPr>
@@ -5872,7 +4862,7 @@
               <a:buNone/>
             </a:pPr>
             <a:r>
-              <a:rPr lang="en-US" sz="3600" b="1" dirty="0">
+              <a:rPr lang="en-US" sz="3400" b="1" dirty="0">
                 <a:solidFill>
                   <a:srgbClr val="FFFFFF"/>
                 </a:solidFill>
@@ -5882,7 +4872,7 @@
               </a:rPr>
               <a:t>Small, frequent, programmatic — with receipts.</a:t>
             </a:r>
-            <a:endParaRPr lang="en-US" sz="3600" dirty="0"/>
+            <a:endParaRPr lang="en-US" sz="3400" dirty="0"/>
           </a:p>
         </p:txBody>
       </p:sp>
@@ -5894,7 +4884,7 @@
         </p:nvSpPr>
         <p:spPr>
           <a:xfrm>
-            <a:off x="594360" y="2889504"/>
+            <a:off x="594360" y="2907792"/>
             <a:ext cx="128016" cy="128016"/>
           </a:xfrm>
           <a:prstGeom prst="ellipse">
@@ -5920,7 +4910,7 @@
         <p:spPr>
           <a:xfrm>
             <a:off x="886968" y="2743200"/>
-            <a:ext cx="6108192" cy="411480"/>
+            <a:ext cx="5650992" cy="457200"/>
           </a:xfrm>
           <a:prstGeom prst="rect">
             <a:avLst/>
@@ -5958,7 +4948,7 @@
         </p:nvSpPr>
         <p:spPr>
           <a:xfrm>
-            <a:off x="594360" y="3300984"/>
+            <a:off x="594360" y="3364992"/>
             <a:ext cx="128016" cy="128016"/>
           </a:xfrm>
           <a:prstGeom prst="ellipse">
@@ -5983,8 +4973,8 @@
         </p:nvSpPr>
         <p:spPr>
           <a:xfrm>
-            <a:off x="886968" y="3154680"/>
-            <a:ext cx="6108192" cy="411480"/>
+            <a:off x="886968" y="3200400"/>
+            <a:ext cx="5650992" cy="457200"/>
           </a:xfrm>
           <a:prstGeom prst="rect">
             <a:avLst/>
@@ -6022,7 +5012,7 @@
         </p:nvSpPr>
         <p:spPr>
           <a:xfrm>
-            <a:off x="594360" y="3712464"/>
+            <a:off x="594360" y="3822192"/>
             <a:ext cx="128016" cy="128016"/>
           </a:xfrm>
           <a:prstGeom prst="ellipse">
@@ -6047,8 +5037,8 @@
         </p:nvSpPr>
         <p:spPr>
           <a:xfrm>
-            <a:off x="886968" y="3566160"/>
-            <a:ext cx="6108192" cy="411480"/>
+            <a:off x="886968" y="3657600"/>
+            <a:ext cx="5650992" cy="457200"/>
           </a:xfrm>
           <a:prstGeom prst="rect">
             <a:avLst/>
@@ -6086,7 +5076,7 @@
         </p:nvSpPr>
         <p:spPr>
           <a:xfrm>
-            <a:off x="594360" y="4123944"/>
+            <a:off x="594360" y="4279392"/>
             <a:ext cx="128016" cy="128016"/>
           </a:xfrm>
           <a:prstGeom prst="ellipse">
@@ -6111,8 +5101,8 @@
         </p:nvSpPr>
         <p:spPr>
           <a:xfrm>
-            <a:off x="886968" y="3977640"/>
-            <a:ext cx="6108192" cy="411480"/>
+            <a:off x="886968" y="4114800"/>
+            <a:ext cx="5650992" cy="457200"/>
           </a:xfrm>
           <a:prstGeom prst="rect">
             <a:avLst/>
@@ -6150,8 +5140,8 @@
         </p:nvSpPr>
         <p:spPr>
           <a:xfrm>
-            <a:off x="7315200" y="2606040"/>
-            <a:ext cx="4297680" cy="3383280"/>
+            <a:off x="6949440" y="2606040"/>
+            <a:ext cx="4663440" cy="3383280"/>
           </a:xfrm>
           <a:prstGeom prst="roundRect">
             <a:avLst>
@@ -6163,7 +5153,7 @@
           </a:solidFill>
           <a:ln w="9525">
             <a:solidFill>
-              <a:srgbClr val="E6E8F0"/>
+              <a:srgbClr val="1A2244"/>
             </a:solidFill>
             <a:prstDash val="solid"/>
           </a:ln>
@@ -6177,8 +5167,8 @@
         </p:nvSpPr>
         <p:spPr>
           <a:xfrm>
-            <a:off x="7607808" y="2862072"/>
-            <a:ext cx="3749040" cy="256032"/>
+            <a:off x="7223760" y="2880360"/>
+            <a:ext cx="4114800" cy="274320"/>
           </a:xfrm>
           <a:prstGeom prst="rect">
             <a:avLst/>
@@ -6194,9 +5184,9 @@
               <a:buNone/>
             </a:pPr>
             <a:r>
-              <a:rPr lang="en-US" sz="850" b="1" spc="200" kern="0" dirty="0">
-                <a:solidFill>
-                  <a:srgbClr val="14F195"/>
+              <a:rPr lang="en-US" sz="900" b="1" spc="150" kern="0" dirty="0">
+                <a:solidFill>
+                  <a:srgbClr val="98A3C7"/>
                 </a:solidFill>
                 <a:latin typeface="JetBrains Mono" pitchFamily="34" charset="0"/>
                 <a:ea typeface="JetBrains Mono" pitchFamily="34" charset="-122"/>
@@ -6204,7 +5194,7 @@
               </a:rPr>
               <a:t>DEVNET PROOF</a:t>
             </a:r>
-            <a:endParaRPr lang="en-US" sz="850" dirty="0"/>
+            <a:endParaRPr lang="en-US" sz="900" dirty="0"/>
           </a:p>
         </p:txBody>
       </p:sp>
@@ -6216,19 +5206,17 @@
         </p:nvSpPr>
         <p:spPr>
           <a:xfrm>
-            <a:off x="7607808" y="3172968"/>
-            <a:ext cx="3749040" cy="548640"/>
-          </a:xfrm>
-          <a:prstGeom prst="rect">
-            <a:avLst/>
-          </a:prstGeom>
-          <a:noFill/>
-          <a:ln/>
-        </p:spPr>
-        <p:txBody>
-          <a:bodyPr wrap="square" lIns="0" tIns="0" rIns="0" bIns="0" rtlCol="0" anchor="ctr">
-            <a:normAutofit/>
-          </a:bodyPr>
+            <a:off x="7223760" y="3154680"/>
+            <a:ext cx="4114800" cy="457200"/>
+          </a:xfrm>
+          <a:prstGeom prst="rect">
+            <a:avLst/>
+          </a:prstGeom>
+          <a:noFill/>
+          <a:ln/>
+        </p:spPr>
+        <p:txBody>
+          <a:bodyPr wrap="square" lIns="0" tIns="0" rIns="0" bIns="0" rtlCol="0" anchor="ctr"/>
           <a:lstStyle/>
           <a:p>
             <a:pPr indent="0" marL="0">
@@ -6238,54 +5226,51 @@
               <a:rPr lang="en-US" sz="1800" b="1" dirty="0">
                 <a:solidFill>
                   <a:srgbClr val="14F195"/>
+                </a:solidFill>
+                <a:latin typeface="JetBrains Mono" pitchFamily="34" charset="0"/>
+                <a:ea typeface="JetBrains Mono" pitchFamily="34" charset="-122"/>
+                <a:cs typeface="JetBrains Mono" pitchFamily="34" charset="-120"/>
+              </a:rPr>
+              <a:t>$ npm run devnet:demo</a:t>
+            </a:r>
+            <a:endParaRPr lang="en-US" sz="1800" dirty="0"/>
+          </a:p>
+        </p:txBody>
+      </p:sp>
+      <p:sp>
+        <p:nvSpPr>
+          <p:cNvPr id="22" name="Text 20"/>
+          <p:cNvSpPr/>
+          <p:nvPr/>
+        </p:nvSpPr>
+        <p:spPr>
+          <a:xfrm>
+            <a:off x="7223760" y="3886200"/>
+            <a:ext cx="4114800" cy="2011680"/>
+          </a:xfrm>
+          <a:prstGeom prst="rect">
+            <a:avLst/>
+          </a:prstGeom>
+          <a:noFill/>
+          <a:ln/>
+        </p:spPr>
+        <p:txBody>
+          <a:bodyPr wrap="square" lIns="0" tIns="0" rIns="0" bIns="0" rtlCol="0" anchor="t"/>
+          <a:lstStyle/>
+          <a:p>
+            <a:pPr indent="0" marL="0">
+              <a:buNone/>
+            </a:pPr>
+            <a:r>
+              <a:rPr lang="en-US" sz="1200" dirty="0">
+                <a:solidFill>
+                  <a:srgbClr val="CBD1EA"/>
                 </a:solidFill>
                 <a:latin typeface="Inter" pitchFamily="34" charset="0"/>
                 <a:ea typeface="Inter" pitchFamily="34" charset="-122"/>
                 <a:cs typeface="Inter" pitchFamily="34" charset="-120"/>
               </a:rPr>
-              <a:t>$ npm run devnet:demo</a:t>
-            </a:r>
-            <a:endParaRPr lang="en-US" sz="1800" dirty="0"/>
-          </a:p>
-        </p:txBody>
-      </p:sp>
-      <p:sp>
-        <p:nvSpPr>
-          <p:cNvPr id="22" name="Text 20"/>
-          <p:cNvSpPr/>
-          <p:nvPr/>
-        </p:nvSpPr>
-        <p:spPr>
-          <a:xfrm>
-            <a:off x="7607808" y="3749040"/>
-            <a:ext cx="3749040" cy="2057400"/>
-          </a:xfrm>
-          <a:prstGeom prst="rect">
-            <a:avLst/>
-          </a:prstGeom>
-          <a:noFill/>
-          <a:ln/>
-        </p:spPr>
-        <p:txBody>
-          <a:bodyPr wrap="square" lIns="0" tIns="0" rIns="0" bIns="0" rtlCol="0" anchor="t"/>
-          <a:lstStyle/>
-          <a:p>
-            <a:pPr indent="0" marL="0">
-              <a:spcAft>
-                <a:spcPts val="400"/>
-              </a:spcAft>
-              <a:buNone/>
-            </a:pPr>
-            <a:r>
-              <a:rPr lang="en-US" sz="1200" dirty="0">
-                <a:solidFill>
-                  <a:srgbClr val="CBD1EA"/>
-                </a:solidFill>
-                <a:latin typeface="Inter" pitchFamily="34" charset="0"/>
-                <a:ea typeface="Inter" pitchFamily="34" charset="-122"/>
-                <a:cs typeface="Inter" pitchFamily="34" charset="-120"/>
-              </a:rPr>
-              <a:t>Creates a temp wallet, sends a tiny payment, attaches a Memo-program receipt, prints an explorer link. Falls back to a simulated receipt if the public faucet is rate-limited.</a:t>
+              <a:t>Creates a temp wallet, sends a tiny payment, attaches a Memo-program receipt, prints the explorer link. Falls back to a simulated receipt if the public faucet is rate-limited.</a:t>
             </a:r>
             <a:endParaRPr lang="en-US" sz="1200" dirty="0"/>
           </a:p>
@@ -6324,7 +5309,7 @@
                 <a:ea typeface="JetBrains Mono" pitchFamily="34" charset="-122"/>
                 <a:cs typeface="JetBrains Mono" pitchFamily="34" charset="-120"/>
               </a:rPr>
-              <a:t>agentpass-guard · github.com/currentlycodinng/agentpass-guard</a:t>
+              <a:t>github.com/currentlycodinng/agentpass-guard</a:t>
             </a:r>
             <a:endParaRPr lang="en-US" sz="800" dirty="0"/>
           </a:p>
@@ -6619,8 +5604,47 @@
         </p:nvSpPr>
         <p:spPr>
           <a:xfrm>
-            <a:off x="548640" y="1280160"/>
-            <a:ext cx="11064240" cy="1463040"/>
+            <a:off x="548640" y="1188720"/>
+            <a:ext cx="10972800" cy="274320"/>
+          </a:xfrm>
+          <a:prstGeom prst="rect">
+            <a:avLst/>
+          </a:prstGeom>
+          <a:noFill/>
+          <a:ln/>
+        </p:spPr>
+        <p:txBody>
+          <a:bodyPr wrap="square" lIns="0" tIns="0" rIns="0" bIns="0" rtlCol="0" anchor="ctr"/>
+          <a:lstStyle/>
+          <a:p>
+            <a:pPr indent="0" marL="0">
+              <a:buNone/>
+            </a:pPr>
+            <a:r>
+              <a:rPr lang="en-US" sz="900" b="1" spc="200" kern="0" dirty="0">
+                <a:solidFill>
+                  <a:srgbClr val="6B7393"/>
+                </a:solidFill>
+                <a:latin typeface="JetBrains Mono" pitchFamily="34" charset="0"/>
+                <a:ea typeface="JetBrains Mono" pitchFamily="34" charset="-122"/>
+                <a:cs typeface="JetBrains Mono" pitchFamily="34" charset="-120"/>
+              </a:rPr>
+              <a:t>WHAT'S SHIPPING</a:t>
+            </a:r>
+            <a:endParaRPr lang="en-US" sz="900" dirty="0"/>
+          </a:p>
+        </p:txBody>
+      </p:sp>
+      <p:sp>
+        <p:nvSpPr>
+          <p:cNvPr id="9" name="Text 7"/>
+          <p:cNvSpPr/>
+          <p:nvPr/>
+        </p:nvSpPr>
+        <p:spPr>
+          <a:xfrm>
+            <a:off x="548640" y="1481328"/>
+            <a:ext cx="11064240" cy="640080"/>
           </a:xfrm>
           <a:prstGeom prst="rect">
             <a:avLst/>
@@ -6638,7 +5662,7 @@
               <a:buNone/>
             </a:pPr>
             <a:r>
-              <a:rPr lang="en-US" sz="3600" b="1" dirty="0">
+              <a:rPr lang="en-US" sz="2600" b="1" dirty="0">
                 <a:solidFill>
                   <a:srgbClr val="0B1020"/>
                 </a:solidFill>
@@ -6646,30 +5670,86 @@
                 <a:ea typeface="Inter" pitchFamily="34" charset="-122"/>
                 <a:cs typeface="Inter" pitchFamily="34" charset="-120"/>
               </a:rPr>
-              <a:t>Narrow enough to ship. Clear enough to judge.</a:t>
-            </a:r>
-            <a:endParaRPr lang="en-US" sz="3600" dirty="0"/>
-          </a:p>
-        </p:txBody>
-      </p:sp>
-      <p:sp>
-        <p:nvSpPr>
-          <p:cNvPr id="9" name="Shape 7"/>
-          <p:cNvSpPr/>
-          <p:nvPr/>
-        </p:nvSpPr>
-        <p:spPr>
-          <a:xfrm>
-            <a:off x="548640" y="2834640"/>
-            <a:ext cx="2697480" cy="2926080"/>
+              <a:t>Static app. No backend. Judges run it in 30 seconds.</a:t>
+            </a:r>
+            <a:endParaRPr lang="en-US" sz="2600" dirty="0"/>
+          </a:p>
+        </p:txBody>
+      </p:sp>
+      <p:sp>
+        <p:nvSpPr>
+          <p:cNvPr id="10" name="Shape 8"/>
+          <p:cNvSpPr/>
+          <p:nvPr/>
+        </p:nvSpPr>
+        <p:spPr>
+          <a:xfrm>
+            <a:off x="594360" y="2496312"/>
+            <a:ext cx="11064240" cy="3703320"/>
           </a:xfrm>
           <a:prstGeom prst="roundRect">
             <a:avLst>
-              <a:gd name="adj" fmla="val 2712"/>
+              <a:gd name="adj" fmla="val 1975"/>
             </a:avLst>
           </a:prstGeom>
           <a:solidFill>
-            <a:srgbClr val="F6F7FB"/>
+            <a:srgbClr val="0B1020">
+              <a:alpha val="8000"/>
+            </a:srgbClr>
+          </a:solidFill>
+          <a:ln w="12700">
+            <a:solidFill>
+              <a:srgbClr val="0B1020">
+                <a:alpha val="8000"/>
+              </a:srgbClr>
+            </a:solidFill>
+            <a:prstDash val="solid"/>
+          </a:ln>
+        </p:spPr>
+      </p:sp>
+      <p:pic>
+        <p:nvPicPr>
+          <p:cNvPr id="11" name="Image 0" descr="assets/screenshots/04-receipts.png">    </p:cNvPr>
+          <p:cNvPicPr>
+            <a:picLocks noChangeAspect="1"/>
+          </p:cNvPicPr>
+          <p:nvPr/>
+        </p:nvPicPr>
+        <p:blipFill>
+          <a:blip r:embed="rId1"/>
+          <a:srcRect l="0" r="0" t="0" b="0"/>
+          <a:stretch/>
+        </p:blipFill>
+        <p:spPr>
+          <a:xfrm>
+            <a:off x="548640" y="2423160"/>
+            <a:ext cx="11064240" cy="3703320"/>
+          </a:xfrm>
+          <a:prstGeom prst="rect">
+            <a:avLst/>
+          </a:prstGeom>
+        </p:spPr>
+      </p:pic>
+      <p:sp>
+        <p:nvSpPr>
+          <p:cNvPr id="12" name="Shape 9"/>
+          <p:cNvSpPr/>
+          <p:nvPr/>
+        </p:nvSpPr>
+        <p:spPr>
+          <a:xfrm>
+            <a:off x="548640" y="2423160"/>
+            <a:ext cx="11064240" cy="3703320"/>
+          </a:xfrm>
+          <a:prstGeom prst="roundRect">
+            <a:avLst>
+              <a:gd name="adj" fmla="val 1975"/>
+            </a:avLst>
+          </a:prstGeom>
+          <a:solidFill>
+            <a:srgbClr val="FFFFFF">
+              <a:alpha val="0"/>
+            </a:srgbClr>
           </a:solidFill>
           <a:ln w="9525">
             <a:solidFill>
@@ -6681,14 +5761,14 @@
       </p:sp>
       <p:sp>
         <p:nvSpPr>
-          <p:cNvPr id="10" name="Text 8"/>
-          <p:cNvSpPr/>
-          <p:nvPr/>
-        </p:nvSpPr>
-        <p:spPr>
-          <a:xfrm>
-            <a:off x="841248" y="3090672"/>
-            <a:ext cx="2148840" cy="256032"/>
+          <p:cNvPr id="13" name="Text 10"/>
+          <p:cNvSpPr/>
+          <p:nvPr/>
+        </p:nvSpPr>
+        <p:spPr>
+          <a:xfrm>
+            <a:off x="548640" y="6446520"/>
+            <a:ext cx="7315200" cy="228600"/>
           </a:xfrm>
           <a:prstGeom prst="rect">
             <a:avLst/>
@@ -6704,623 +5784,15 @@
               <a:buNone/>
             </a:pPr>
             <a:r>
-              <a:rPr lang="en-US" sz="850" b="1" spc="200" kern="0" dirty="0">
-                <a:solidFill>
-                  <a:srgbClr val="00D1FF"/>
+              <a:rPr lang="en-US" sz="800" dirty="0">
+                <a:solidFill>
+                  <a:srgbClr val="6B7393"/>
                 </a:solidFill>
                 <a:latin typeface="JetBrains Mono" pitchFamily="34" charset="0"/>
                 <a:ea typeface="JetBrains Mono" pitchFamily="34" charset="-122"/>
                 <a:cs typeface="JetBrains Mono" pitchFamily="34" charset="-120"/>
               </a:rPr>
-              <a:t>01</a:t>
-            </a:r>
-            <a:endParaRPr lang="en-US" sz="850" dirty="0"/>
-          </a:p>
-        </p:txBody>
-      </p:sp>
-      <p:sp>
-        <p:nvSpPr>
-          <p:cNvPr id="11" name="Text 9"/>
-          <p:cNvSpPr/>
-          <p:nvPr/>
-        </p:nvSpPr>
-        <p:spPr>
-          <a:xfrm>
-            <a:off x="841248" y="3401568"/>
-            <a:ext cx="2148840" cy="548640"/>
-          </a:xfrm>
-          <a:prstGeom prst="rect">
-            <a:avLst/>
-          </a:prstGeom>
-          <a:noFill/>
-          <a:ln/>
-        </p:spPr>
-        <p:txBody>
-          <a:bodyPr wrap="square" lIns="0" tIns="0" rIns="0" bIns="0" rtlCol="0" anchor="ctr">
-            <a:normAutofit/>
-          </a:bodyPr>
-          <a:lstStyle/>
-          <a:p>
-            <a:pPr indent="0" marL="0">
-              <a:buNone/>
-            </a:pPr>
-            <a:r>
-              <a:rPr lang="en-US" sz="1800" b="1" dirty="0">
-                <a:solidFill>
-                  <a:srgbClr val="0B1020"/>
-                </a:solidFill>
-                <a:latin typeface="Inter" pitchFamily="34" charset="0"/>
-                <a:ea typeface="Inter" pitchFamily="34" charset="-122"/>
-                <a:cs typeface="Inter" pitchFamily="34" charset="-120"/>
-              </a:rPr>
-              <a:t>Policy editor</a:t>
-            </a:r>
-            <a:endParaRPr lang="en-US" sz="1800" dirty="0"/>
-          </a:p>
-        </p:txBody>
-      </p:sp>
-      <p:sp>
-        <p:nvSpPr>
-          <p:cNvPr id="12" name="Text 10"/>
-          <p:cNvSpPr/>
-          <p:nvPr/>
-        </p:nvSpPr>
-        <p:spPr>
-          <a:xfrm>
-            <a:off x="841248" y="3977640"/>
-            <a:ext cx="2148840" cy="1600200"/>
-          </a:xfrm>
-          <a:prstGeom prst="rect">
-            <a:avLst/>
-          </a:prstGeom>
-          <a:noFill/>
-          <a:ln/>
-        </p:spPr>
-        <p:txBody>
-          <a:bodyPr wrap="square" lIns="0" tIns="0" rIns="0" bIns="0" rtlCol="0" anchor="t"/>
-          <a:lstStyle/>
-          <a:p>
-            <a:pPr indent="0" marL="0">
-              <a:spcAft>
-                <a:spcPts val="400"/>
-              </a:spcAft>
-              <a:buNone/>
-            </a:pPr>
-            <a:r>
-              <a:rPr lang="en-US" sz="1200" dirty="0">
-                <a:solidFill>
-                  <a:srgbClr val="2B3556"/>
-                </a:solidFill>
-                <a:latin typeface="Inter" pitchFamily="34" charset="0"/>
-                <a:ea typeface="Inter" pitchFamily="34" charset="-122"/>
-                <a:cs typeface="Inter" pitchFamily="34" charset="-120"/>
-              </a:rPr>
-              <a:t>Budget, allowlist, threshold, expiry, revocation.</a:t>
-            </a:r>
-            <a:endParaRPr lang="en-US" sz="1200" dirty="0"/>
-          </a:p>
-        </p:txBody>
-      </p:sp>
-      <p:sp>
-        <p:nvSpPr>
-          <p:cNvPr id="13" name="Shape 11"/>
-          <p:cNvSpPr/>
-          <p:nvPr/>
-        </p:nvSpPr>
-        <p:spPr>
-          <a:xfrm>
-            <a:off x="3410712" y="2834640"/>
-            <a:ext cx="2697480" cy="2926080"/>
-          </a:xfrm>
-          <a:prstGeom prst="roundRect">
-            <a:avLst>
-              <a:gd name="adj" fmla="val 2712"/>
-            </a:avLst>
-          </a:prstGeom>
-          <a:solidFill>
-            <a:srgbClr val="F6F7FB"/>
-          </a:solidFill>
-          <a:ln w="9525">
-            <a:solidFill>
-              <a:srgbClr val="E6E8F0"/>
-            </a:solidFill>
-            <a:prstDash val="solid"/>
-          </a:ln>
-        </p:spPr>
-      </p:sp>
-      <p:sp>
-        <p:nvSpPr>
-          <p:cNvPr id="14" name="Text 12"/>
-          <p:cNvSpPr/>
-          <p:nvPr/>
-        </p:nvSpPr>
-        <p:spPr>
-          <a:xfrm>
-            <a:off x="3703320" y="3090672"/>
-            <a:ext cx="2148840" cy="256032"/>
-          </a:xfrm>
-          <a:prstGeom prst="rect">
-            <a:avLst/>
-          </a:prstGeom>
-          <a:noFill/>
-          <a:ln/>
-        </p:spPr>
-        <p:txBody>
-          <a:bodyPr wrap="square" lIns="0" tIns="0" rIns="0" bIns="0" rtlCol="0" anchor="ctr"/>
-          <a:lstStyle/>
-          <a:p>
-            <a:pPr indent="0" marL="0">
-              <a:buNone/>
-            </a:pPr>
-            <a:r>
-              <a:rPr lang="en-US" sz="850" b="1" spc="200" kern="0" dirty="0">
-                <a:solidFill>
-                  <a:srgbClr val="9945FF"/>
-                </a:solidFill>
-                <a:latin typeface="JetBrains Mono" pitchFamily="34" charset="0"/>
-                <a:ea typeface="JetBrains Mono" pitchFamily="34" charset="-122"/>
-                <a:cs typeface="JetBrains Mono" pitchFamily="34" charset="-120"/>
-              </a:rPr>
-              <a:t>02</a:t>
-            </a:r>
-            <a:endParaRPr lang="en-US" sz="850" dirty="0"/>
-          </a:p>
-        </p:txBody>
-      </p:sp>
-      <p:sp>
-        <p:nvSpPr>
-          <p:cNvPr id="15" name="Text 13"/>
-          <p:cNvSpPr/>
-          <p:nvPr/>
-        </p:nvSpPr>
-        <p:spPr>
-          <a:xfrm>
-            <a:off x="3703320" y="3401568"/>
-            <a:ext cx="2148840" cy="548640"/>
-          </a:xfrm>
-          <a:prstGeom prst="rect">
-            <a:avLst/>
-          </a:prstGeom>
-          <a:noFill/>
-          <a:ln/>
-        </p:spPr>
-        <p:txBody>
-          <a:bodyPr wrap="square" lIns="0" tIns="0" rIns="0" bIns="0" rtlCol="0" anchor="ctr">
-            <a:normAutofit/>
-          </a:bodyPr>
-          <a:lstStyle/>
-          <a:p>
-            <a:pPr indent="0" marL="0">
-              <a:buNone/>
-            </a:pPr>
-            <a:r>
-              <a:rPr lang="en-US" sz="1800" b="1" dirty="0">
-                <a:solidFill>
-                  <a:srgbClr val="0B1020"/>
-                </a:solidFill>
-                <a:latin typeface="Inter" pitchFamily="34" charset="0"/>
-                <a:ea typeface="Inter" pitchFamily="34" charset="-122"/>
-                <a:cs typeface="Inter" pitchFamily="34" charset="-120"/>
-              </a:rPr>
-              <a:t>Agent runner</a:t>
-            </a:r>
-            <a:endParaRPr lang="en-US" sz="1800" dirty="0"/>
-          </a:p>
-        </p:txBody>
-      </p:sp>
-      <p:sp>
-        <p:nvSpPr>
-          <p:cNvPr id="16" name="Text 14"/>
-          <p:cNvSpPr/>
-          <p:nvPr/>
-        </p:nvSpPr>
-        <p:spPr>
-          <a:xfrm>
-            <a:off x="3703320" y="3977640"/>
-            <a:ext cx="2148840" cy="1600200"/>
-          </a:xfrm>
-          <a:prstGeom prst="rect">
-            <a:avLst/>
-          </a:prstGeom>
-          <a:noFill/>
-          <a:ln/>
-        </p:spPr>
-        <p:txBody>
-          <a:bodyPr wrap="square" lIns="0" tIns="0" rIns="0" bIns="0" rtlCol="0" anchor="t"/>
-          <a:lstStyle/>
-          <a:p>
-            <a:pPr indent="0" marL="0">
-              <a:spcAft>
-                <a:spcPts val="400"/>
-              </a:spcAft>
-              <a:buNone/>
-            </a:pPr>
-            <a:r>
-              <a:rPr lang="en-US" sz="1200" dirty="0">
-                <a:solidFill>
-                  <a:srgbClr val="2B3556"/>
-                </a:solidFill>
-                <a:latin typeface="Inter" pitchFamily="34" charset="0"/>
-                <a:ea typeface="Inter" pitchFamily="34" charset="-122"/>
-                <a:cs typeface="Inter" pitchFamily="34" charset="-120"/>
-              </a:rPr>
-              <a:t>Three scripted paid actions: approve / block / pause.</a:t>
-            </a:r>
-            <a:endParaRPr lang="en-US" sz="1200" dirty="0"/>
-          </a:p>
-        </p:txBody>
-      </p:sp>
-      <p:sp>
-        <p:nvSpPr>
-          <p:cNvPr id="17" name="Shape 15"/>
-          <p:cNvSpPr/>
-          <p:nvPr/>
-        </p:nvSpPr>
-        <p:spPr>
-          <a:xfrm>
-            <a:off x="6272784" y="2834640"/>
-            <a:ext cx="2697480" cy="2926080"/>
-          </a:xfrm>
-          <a:prstGeom prst="roundRect">
-            <a:avLst>
-              <a:gd name="adj" fmla="val 2712"/>
-            </a:avLst>
-          </a:prstGeom>
-          <a:solidFill>
-            <a:srgbClr val="F6F7FB"/>
-          </a:solidFill>
-          <a:ln w="9525">
-            <a:solidFill>
-              <a:srgbClr val="E6E8F0"/>
-            </a:solidFill>
-            <a:prstDash val="solid"/>
-          </a:ln>
-        </p:spPr>
-      </p:sp>
-      <p:sp>
-        <p:nvSpPr>
-          <p:cNvPr id="18" name="Text 16"/>
-          <p:cNvSpPr/>
-          <p:nvPr/>
-        </p:nvSpPr>
-        <p:spPr>
-          <a:xfrm>
-            <a:off x="6565392" y="3090672"/>
-            <a:ext cx="2148840" cy="256032"/>
-          </a:xfrm>
-          <a:prstGeom prst="rect">
-            <a:avLst/>
-          </a:prstGeom>
-          <a:noFill/>
-          <a:ln/>
-        </p:spPr>
-        <p:txBody>
-          <a:bodyPr wrap="square" lIns="0" tIns="0" rIns="0" bIns="0" rtlCol="0" anchor="ctr"/>
-          <a:lstStyle/>
-          <a:p>
-            <a:pPr indent="0" marL="0">
-              <a:buNone/>
-            </a:pPr>
-            <a:r>
-              <a:rPr lang="en-US" sz="850" b="1" spc="200" kern="0" dirty="0">
-                <a:solidFill>
-                  <a:srgbClr val="B45309"/>
-                </a:solidFill>
-                <a:latin typeface="JetBrains Mono" pitchFamily="34" charset="0"/>
-                <a:ea typeface="JetBrains Mono" pitchFamily="34" charset="-122"/>
-                <a:cs typeface="JetBrains Mono" pitchFamily="34" charset="-120"/>
-              </a:rPr>
-              <a:t>03</a:t>
-            </a:r>
-            <a:endParaRPr lang="en-US" sz="850" dirty="0"/>
-          </a:p>
-        </p:txBody>
-      </p:sp>
-      <p:sp>
-        <p:nvSpPr>
-          <p:cNvPr id="19" name="Text 17"/>
-          <p:cNvSpPr/>
-          <p:nvPr/>
-        </p:nvSpPr>
-        <p:spPr>
-          <a:xfrm>
-            <a:off x="6565392" y="3401568"/>
-            <a:ext cx="2148840" cy="548640"/>
-          </a:xfrm>
-          <a:prstGeom prst="rect">
-            <a:avLst/>
-          </a:prstGeom>
-          <a:noFill/>
-          <a:ln/>
-        </p:spPr>
-        <p:txBody>
-          <a:bodyPr wrap="square" lIns="0" tIns="0" rIns="0" bIns="0" rtlCol="0" anchor="ctr">
-            <a:normAutofit/>
-          </a:bodyPr>
-          <a:lstStyle/>
-          <a:p>
-            <a:pPr indent="0" marL="0">
-              <a:buNone/>
-            </a:pPr>
-            <a:r>
-              <a:rPr lang="en-US" sz="1800" b="1" dirty="0">
-                <a:solidFill>
-                  <a:srgbClr val="0B1020"/>
-                </a:solidFill>
-                <a:latin typeface="Inter" pitchFamily="34" charset="0"/>
-                <a:ea typeface="Inter" pitchFamily="34" charset="-122"/>
-                <a:cs typeface="Inter" pitchFamily="34" charset="-120"/>
-              </a:rPr>
-              <a:t>Receipts log</a:t>
-            </a:r>
-            <a:endParaRPr lang="en-US" sz="1800" dirty="0"/>
-          </a:p>
-        </p:txBody>
-      </p:sp>
-      <p:sp>
-        <p:nvSpPr>
-          <p:cNvPr id="20" name="Text 18"/>
-          <p:cNvSpPr/>
-          <p:nvPr/>
-        </p:nvSpPr>
-        <p:spPr>
-          <a:xfrm>
-            <a:off x="6565392" y="3977640"/>
-            <a:ext cx="2148840" cy="1600200"/>
-          </a:xfrm>
-          <a:prstGeom prst="rect">
-            <a:avLst/>
-          </a:prstGeom>
-          <a:noFill/>
-          <a:ln/>
-        </p:spPr>
-        <p:txBody>
-          <a:bodyPr wrap="square" lIns="0" tIns="0" rIns="0" bIns="0" rtlCol="0" anchor="t"/>
-          <a:lstStyle/>
-          <a:p>
-            <a:pPr indent="0" marL="0">
-              <a:spcAft>
-                <a:spcPts val="400"/>
-              </a:spcAft>
-              <a:buNone/>
-            </a:pPr>
-            <a:r>
-              <a:rPr lang="en-US" sz="1200" dirty="0">
-                <a:solidFill>
-                  <a:srgbClr val="2B3556"/>
-                </a:solidFill>
-                <a:latin typeface="Inter" pitchFamily="34" charset="0"/>
-                <a:ea typeface="Inter" pitchFamily="34" charset="-122"/>
-                <a:cs typeface="Inter" pitchFamily="34" charset="-120"/>
-              </a:rPr>
-              <a:t>Every decision, every amount, every status, exportable JSON.</a:t>
-            </a:r>
-            <a:endParaRPr lang="en-US" sz="1200" dirty="0"/>
-          </a:p>
-        </p:txBody>
-      </p:sp>
-      <p:sp>
-        <p:nvSpPr>
-          <p:cNvPr id="21" name="Shape 19"/>
-          <p:cNvSpPr/>
-          <p:nvPr/>
-        </p:nvSpPr>
-        <p:spPr>
-          <a:xfrm>
-            <a:off x="9134856" y="2834640"/>
-            <a:ext cx="2697480" cy="2926080"/>
-          </a:xfrm>
-          <a:prstGeom prst="roundRect">
-            <a:avLst>
-              <a:gd name="adj" fmla="val 2712"/>
-            </a:avLst>
-          </a:prstGeom>
-          <a:solidFill>
-            <a:srgbClr val="F6F7FB"/>
-          </a:solidFill>
-          <a:ln w="9525">
-            <a:solidFill>
-              <a:srgbClr val="E6E8F0"/>
-            </a:solidFill>
-            <a:prstDash val="solid"/>
-          </a:ln>
-        </p:spPr>
-      </p:sp>
-      <p:sp>
-        <p:nvSpPr>
-          <p:cNvPr id="22" name="Text 20"/>
-          <p:cNvSpPr/>
-          <p:nvPr/>
-        </p:nvSpPr>
-        <p:spPr>
-          <a:xfrm>
-            <a:off x="9427464" y="3090672"/>
-            <a:ext cx="2148840" cy="256032"/>
-          </a:xfrm>
-          <a:prstGeom prst="rect">
-            <a:avLst/>
-          </a:prstGeom>
-          <a:noFill/>
-          <a:ln/>
-        </p:spPr>
-        <p:txBody>
-          <a:bodyPr wrap="square" lIns="0" tIns="0" rIns="0" bIns="0" rtlCol="0" anchor="ctr"/>
-          <a:lstStyle/>
-          <a:p>
-            <a:pPr indent="0" marL="0">
-              <a:buNone/>
-            </a:pPr>
-            <a:r>
-              <a:rPr lang="en-US" sz="850" b="1" spc="200" kern="0" dirty="0">
-                <a:solidFill>
-                  <a:srgbClr val="047857"/>
-                </a:solidFill>
-                <a:latin typeface="JetBrains Mono" pitchFamily="34" charset="0"/>
-                <a:ea typeface="JetBrains Mono" pitchFamily="34" charset="-122"/>
-                <a:cs typeface="JetBrains Mono" pitchFamily="34" charset="-120"/>
-              </a:rPr>
-              <a:t>04</a:t>
-            </a:r>
-            <a:endParaRPr lang="en-US" sz="850" dirty="0"/>
-          </a:p>
-        </p:txBody>
-      </p:sp>
-      <p:sp>
-        <p:nvSpPr>
-          <p:cNvPr id="23" name="Text 21"/>
-          <p:cNvSpPr/>
-          <p:nvPr/>
-        </p:nvSpPr>
-        <p:spPr>
-          <a:xfrm>
-            <a:off x="9427464" y="3401568"/>
-            <a:ext cx="2148840" cy="548640"/>
-          </a:xfrm>
-          <a:prstGeom prst="rect">
-            <a:avLst/>
-          </a:prstGeom>
-          <a:noFill/>
-          <a:ln/>
-        </p:spPr>
-        <p:txBody>
-          <a:bodyPr wrap="square" lIns="0" tIns="0" rIns="0" bIns="0" rtlCol="0" anchor="ctr">
-            <a:normAutofit/>
-          </a:bodyPr>
-          <a:lstStyle/>
-          <a:p>
-            <a:pPr indent="0" marL="0">
-              <a:buNone/>
-            </a:pPr>
-            <a:r>
-              <a:rPr lang="en-US" sz="1800" b="1" dirty="0">
-                <a:solidFill>
-                  <a:srgbClr val="0B1020"/>
-                </a:solidFill>
-                <a:latin typeface="Inter" pitchFamily="34" charset="0"/>
-                <a:ea typeface="Inter" pitchFamily="34" charset="-122"/>
-                <a:cs typeface="Inter" pitchFamily="34" charset="-120"/>
-              </a:rPr>
-              <a:t>Devnet path</a:t>
-            </a:r>
-            <a:endParaRPr lang="en-US" sz="1800" dirty="0"/>
-          </a:p>
-        </p:txBody>
-      </p:sp>
-      <p:sp>
-        <p:nvSpPr>
-          <p:cNvPr id="24" name="Text 22"/>
-          <p:cNvSpPr/>
-          <p:nvPr/>
-        </p:nvSpPr>
-        <p:spPr>
-          <a:xfrm>
-            <a:off x="9427464" y="3977640"/>
-            <a:ext cx="2148840" cy="1600200"/>
-          </a:xfrm>
-          <a:prstGeom prst="rect">
-            <a:avLst/>
-          </a:prstGeom>
-          <a:noFill/>
-          <a:ln/>
-        </p:spPr>
-        <p:txBody>
-          <a:bodyPr wrap="square" lIns="0" tIns="0" rIns="0" bIns="0" rtlCol="0" anchor="t"/>
-          <a:lstStyle/>
-          <a:p>
-            <a:pPr indent="0" marL="0">
-              <a:spcAft>
-                <a:spcPts val="400"/>
-              </a:spcAft>
-              <a:buNone/>
-            </a:pPr>
-            <a:r>
-              <a:rPr lang="en-US" sz="1200" dirty="0">
-                <a:solidFill>
-                  <a:srgbClr val="2B3556"/>
-                </a:solidFill>
-                <a:latin typeface="Inter" pitchFamily="34" charset="0"/>
-                <a:ea typeface="Inter" pitchFamily="34" charset="-122"/>
-                <a:cs typeface="Inter" pitchFamily="34" charset="-120"/>
-              </a:rPr>
-              <a:t>Optional Solana settlement with Memo-program receipts.</a:t>
-            </a:r>
-            <a:endParaRPr lang="en-US" sz="1200" dirty="0"/>
-          </a:p>
-        </p:txBody>
-      </p:sp>
-      <p:sp>
-        <p:nvSpPr>
-          <p:cNvPr id="25" name="Text 23"/>
-          <p:cNvSpPr/>
-          <p:nvPr/>
-        </p:nvSpPr>
-        <p:spPr>
-          <a:xfrm>
-            <a:off x="548640" y="5897880"/>
-            <a:ext cx="11064240" cy="457200"/>
-          </a:xfrm>
-          <a:prstGeom prst="rect">
-            <a:avLst/>
-          </a:prstGeom>
-          <a:noFill/>
-          <a:ln/>
-        </p:spPr>
-        <p:txBody>
-          <a:bodyPr wrap="square" lIns="0" tIns="0" rIns="0" bIns="0" rtlCol="0" anchor="ctr"/>
-          <a:lstStyle/>
-          <a:p>
-            <a:pPr algn="ctr" indent="0" marL="0">
-              <a:buNone/>
-            </a:pPr>
-            <a:r>
-              <a:rPr lang="en-US" sz="1400" b="1" dirty="0">
-                <a:solidFill>
-                  <a:srgbClr val="2B3556"/>
-                </a:solidFill>
-                <a:latin typeface="Inter" pitchFamily="34" charset="0"/>
-                <a:ea typeface="Inter" pitchFamily="34" charset="-122"/>
-                <a:cs typeface="Inter" pitchFamily="34" charset="-120"/>
-              </a:rPr>
-              <a:t>Static web app. No backend. Judges can run it in 30 seconds.</a:t>
-            </a:r>
-            <a:endParaRPr lang="en-US" sz="1400" dirty="0"/>
-          </a:p>
-        </p:txBody>
-      </p:sp>
-      <p:sp>
-        <p:nvSpPr>
-          <p:cNvPr id="26" name="Text 24"/>
-          <p:cNvSpPr/>
-          <p:nvPr/>
-        </p:nvSpPr>
-        <p:spPr>
-          <a:xfrm>
-            <a:off x="548640" y="6446520"/>
-            <a:ext cx="7315200" cy="228600"/>
-          </a:xfrm>
-          <a:prstGeom prst="rect">
-            <a:avLst/>
-          </a:prstGeom>
-          <a:noFill/>
-          <a:ln/>
-        </p:spPr>
-        <p:txBody>
-          <a:bodyPr wrap="square" lIns="0" tIns="0" rIns="0" bIns="0" rtlCol="0" anchor="ctr"/>
-          <a:lstStyle/>
-          <a:p>
-            <a:pPr indent="0" marL="0">
-              <a:buNone/>
-            </a:pPr>
-            <a:r>
-              <a:rPr lang="en-US" sz="800" dirty="0">
-                <a:solidFill>
-                  <a:srgbClr val="6B7393"/>
-                </a:solidFill>
-                <a:latin typeface="JetBrains Mono" pitchFamily="34" charset="0"/>
-                <a:ea typeface="JetBrains Mono" pitchFamily="34" charset="-122"/>
-                <a:cs typeface="JetBrains Mono" pitchFamily="34" charset="-120"/>
-              </a:rPr>
-              <a:t>agentpass-guard · github.com/currentlycodinng/agentpass-guard</a:t>
+              <a:t>github.com/currentlycodinng/agentpass-guard</a:t>
             </a:r>
             <a:endParaRPr lang="en-US" sz="800" dirty="0"/>
           </a:p>
@@ -7328,7 +5800,7 @@
       </p:sp>
       <p:sp>
         <p:nvSpPr>
-          <p:cNvPr id="27" name="Text 25"/>
+          <p:cNvPr id="14" name="Text 11"/>
           <p:cNvSpPr/>
           <p:nvPr/>
         </p:nvSpPr>
@@ -7656,7 +6128,7 @@
         </p:nvSpPr>
         <p:spPr>
           <a:xfrm>
-            <a:off x="594360" y="2889504"/>
+            <a:off x="594360" y="2907792"/>
             <a:ext cx="128016" cy="128016"/>
           </a:xfrm>
           <a:prstGeom prst="ellipse">
@@ -7682,7 +6154,7 @@
         <p:spPr>
           <a:xfrm>
             <a:off x="886968" y="2743200"/>
-            <a:ext cx="6291072" cy="411480"/>
+            <a:ext cx="6291072" cy="457200"/>
           </a:xfrm>
           <a:prstGeom prst="rect">
             <a:avLst/>
@@ -7720,7 +6192,7 @@
         </p:nvSpPr>
         <p:spPr>
           <a:xfrm>
-            <a:off x="594360" y="3300984"/>
+            <a:off x="594360" y="3364992"/>
             <a:ext cx="128016" cy="128016"/>
           </a:xfrm>
           <a:prstGeom prst="ellipse">
@@ -7745,8 +6217,8 @@
         </p:nvSpPr>
         <p:spPr>
           <a:xfrm>
-            <a:off x="886968" y="3154680"/>
-            <a:ext cx="6291072" cy="411480"/>
+            <a:off x="886968" y="3200400"/>
+            <a:ext cx="6291072" cy="457200"/>
           </a:xfrm>
           <a:prstGeom prst="rect">
             <a:avLst/>
@@ -7784,7 +6256,7 @@
         </p:nvSpPr>
         <p:spPr>
           <a:xfrm>
-            <a:off x="594360" y="3712464"/>
+            <a:off x="594360" y="3822192"/>
             <a:ext cx="128016" cy="128016"/>
           </a:xfrm>
           <a:prstGeom prst="ellipse">
@@ -7809,8 +6281,8 @@
         </p:nvSpPr>
         <p:spPr>
           <a:xfrm>
-            <a:off x="886968" y="3566160"/>
-            <a:ext cx="6291072" cy="411480"/>
+            <a:off x="886968" y="3657600"/>
+            <a:ext cx="6291072" cy="457200"/>
           </a:xfrm>
           <a:prstGeom prst="rect">
             <a:avLst/>
@@ -7848,7 +6320,7 @@
         </p:nvSpPr>
         <p:spPr>
           <a:xfrm>
-            <a:off x="594360" y="4123944"/>
+            <a:off x="594360" y="4279392"/>
             <a:ext cx="128016" cy="128016"/>
           </a:xfrm>
           <a:prstGeom prst="ellipse">
@@ -7873,8 +6345,8 @@
         </p:nvSpPr>
         <p:spPr>
           <a:xfrm>
-            <a:off x="886968" y="3977640"/>
-            <a:ext cx="6291072" cy="411480"/>
+            <a:off x="886968" y="4114800"/>
+            <a:ext cx="6291072" cy="457200"/>
           </a:xfrm>
           <a:prstGeom prst="rect">
             <a:avLst/>
@@ -7939,8 +6411,8 @@
         </p:nvSpPr>
         <p:spPr>
           <a:xfrm>
-            <a:off x="7607808" y="2862072"/>
-            <a:ext cx="3749040" cy="256032"/>
+            <a:off x="7589520" y="2880360"/>
+            <a:ext cx="3749040" cy="274320"/>
           </a:xfrm>
           <a:prstGeom prst="rect">
             <a:avLst/>
@@ -7956,7 +6428,7 @@
               <a:buNone/>
             </a:pPr>
             <a:r>
-              <a:rPr lang="en-US" sz="850" b="1" spc="200" kern="0" dirty="0">
+              <a:rPr lang="en-US" sz="900" b="1" spc="150" kern="0" dirty="0">
                 <a:solidFill>
                   <a:srgbClr val="9945FF"/>
                 </a:solidFill>
@@ -7966,7 +6438,7 @@
               </a:rPr>
               <a:t>WHY THIS CAN WIN</a:t>
             </a:r>
-            <a:endParaRPr lang="en-US" sz="850" dirty="0"/>
+            <a:endParaRPr lang="en-US" sz="900" dirty="0"/>
           </a:p>
         </p:txBody>
       </p:sp>
@@ -7978,7 +6450,7 @@
         </p:nvSpPr>
         <p:spPr>
           <a:xfrm>
-            <a:off x="7607808" y="3172968"/>
+            <a:off x="7589520" y="3154680"/>
             <a:ext cx="3749040" cy="548640"/>
           </a:xfrm>
           <a:prstGeom prst="rect">
@@ -7988,16 +6460,14 @@
           <a:ln/>
         </p:spPr>
         <p:txBody>
-          <a:bodyPr wrap="square" lIns="0" tIns="0" rIns="0" bIns="0" rtlCol="0" anchor="ctr">
-            <a:normAutofit/>
-          </a:bodyPr>
+          <a:bodyPr wrap="square" lIns="0" tIns="0" rIns="0" bIns="0" rtlCol="0" anchor="ctr"/>
           <a:lstStyle/>
           <a:p>
             <a:pPr indent="0" marL="0">
               <a:buNone/>
             </a:pPr>
             <a:r>
-              <a:rPr lang="en-US" sz="1800" b="1" dirty="0">
+              <a:rPr lang="en-US" sz="2200" b="1" dirty="0">
                 <a:solidFill>
                   <a:srgbClr val="0B1020"/>
                 </a:solidFill>
@@ -8007,7 +6477,7 @@
               </a:rPr>
               <a:t>Completes the rail.</a:t>
             </a:r>
-            <a:endParaRPr lang="en-US" sz="1800" dirty="0"/>
+            <a:endParaRPr lang="en-US" sz="2200" dirty="0"/>
           </a:p>
         </p:txBody>
       </p:sp>
@@ -8019,8 +6489,8 @@
         </p:nvSpPr>
         <p:spPr>
           <a:xfrm>
-            <a:off x="7607808" y="3749040"/>
-            <a:ext cx="3749040" cy="2057400"/>
+            <a:off x="7589520" y="3886200"/>
+            <a:ext cx="3749040" cy="2011680"/>
           </a:xfrm>
           <a:prstGeom prst="rect">
             <a:avLst/>
@@ -8033,13 +6503,10 @@
           <a:lstStyle/>
           <a:p>
             <a:pPr indent="0" marL="0">
-              <a:spcAft>
-                <a:spcPts val="400"/>
-              </a:spcAft>
-              <a:buNone/>
-            </a:pPr>
-            <a:r>
-              <a:rPr lang="en-US" sz="1200" dirty="0">
+              <a:buNone/>
+            </a:pPr>
+            <a:r>
+              <a:rPr lang="en-US" sz="1300" dirty="0">
                 <a:solidFill>
                   <a:srgbClr val="2B3556"/>
                 </a:solidFill>
@@ -8049,7 +6516,7 @@
               </a:rPr>
               <a:t>The problem is current. The demo is concrete. The Solana integration is real. The wedge does not fight the ecosystem — it completes it.</a:t>
             </a:r>
-            <a:endParaRPr lang="en-US" sz="1200" dirty="0"/>
+            <a:endParaRPr lang="en-US" sz="1300" dirty="0"/>
           </a:p>
         </p:txBody>
       </p:sp>
@@ -8200,7 +6667,7 @@
                 <a:ea typeface="JetBrains Mono" pitchFamily="34" charset="-122"/>
                 <a:cs typeface="JetBrains Mono" pitchFamily="34" charset="-120"/>
               </a:rPr>
-              <a:t>github.com/currentlycodinng/agentpass-guard</a:t>
+              <a:t>currentlycodinng.github.io/agentpass-guard</a:t>
             </a:r>
             <a:endParaRPr lang="en-US" sz="1100" dirty="0"/>
           </a:p>
@@ -8239,7 +6706,7 @@
                 <a:ea typeface="JetBrains Mono" pitchFamily="34" charset="-122"/>
                 <a:cs typeface="JetBrains Mono" pitchFamily="34" charset="-120"/>
               </a:rPr>
-              <a:t>agentpass-guard · github.com/currentlycodinng/agentpass-guard</a:t>
+              <a:t>github.com/currentlycodinng/agentpass-guard</a:t>
             </a:r>
             <a:endParaRPr lang="en-US" sz="800" dirty="0"/>
           </a:p>
